--- a/deep_learning/3_RNN_NLP/1_RNN_intuition/2_RNN_2_types.pptx
+++ b/deep_learning/3_RNN_NLP/1_RNN_intuition/2_RNN_2_types.pptx
@@ -13,13 +13,13 @@
   <p:sldIdLst>
     <p:sldId id="276" r:id="rId2"/>
     <p:sldId id="279" r:id="rId3"/>
-    <p:sldId id="277" r:id="rId4"/>
+    <p:sldId id="288" r:id="rId4"/>
     <p:sldId id="283" r:id="rId5"/>
     <p:sldId id="284" r:id="rId6"/>
     <p:sldId id="286" r:id="rId7"/>
     <p:sldId id="285" r:id="rId8"/>
-    <p:sldId id="287" r:id="rId9"/>
-    <p:sldId id="271" r:id="rId10"/>
+    <p:sldId id="277" r:id="rId9"/>
+    <p:sldId id="287" r:id="rId10"/>
     <p:sldId id="275" r:id="rId11"/>
   </p:sldIdLst>
   <p:sldSz cx="12192000" cy="6858000"/>
@@ -224,7 +224,7 @@
           <a:p>
             <a:fld id="{7BAEECA8-D063-486F-AE31-5020270C1449}" type="datetimeFigureOut">
               <a:rPr lang="en-US" smtClean="0"/>
-              <a:t>4/9/2026</a:t>
+              <a:t>4/19/2026</a:t>
             </a:fld>
             <a:endParaRPr lang="en-US"/>
           </a:p>
@@ -817,7 +817,7 @@
           <a:p>
             <a:fld id="{CB233BD1-3BA8-448D-9D08-7846095EA517}" type="datetimeFigureOut">
               <a:rPr lang="en-US" smtClean="0"/>
-              <a:t>4/9/2026</a:t>
+              <a:t>4/19/2026</a:t>
             </a:fld>
             <a:endParaRPr lang="en-US"/>
           </a:p>
@@ -1257,7 +1257,7 @@
           <a:p>
             <a:fld id="{6C63499C-1FAC-4F66-96F8-6DA2CC28B748}" type="slidenum">
               <a:rPr lang="en-US" smtClean="0"/>
-              <a:t>8</a:t>
+              <a:t>9</a:t>
             </a:fld>
             <a:endParaRPr lang="en-US"/>
           </a:p>
@@ -1423,7 +1423,7 @@
           <a:p>
             <a:fld id="{6383FAE1-13DE-4511-8C1B-C8AFB720664C}" type="datetimeFigureOut">
               <a:rPr lang="en-US" smtClean="0"/>
-              <a:t>4/9/2026</a:t>
+              <a:t>4/19/2026</a:t>
             </a:fld>
             <a:endParaRPr lang="en-US"/>
           </a:p>
@@ -1621,7 +1621,7 @@
           <a:p>
             <a:fld id="{6383FAE1-13DE-4511-8C1B-C8AFB720664C}" type="datetimeFigureOut">
               <a:rPr lang="en-US" smtClean="0"/>
-              <a:t>4/9/2026</a:t>
+              <a:t>4/19/2026</a:t>
             </a:fld>
             <a:endParaRPr lang="en-US"/>
           </a:p>
@@ -1829,7 +1829,7 @@
           <a:p>
             <a:fld id="{6383FAE1-13DE-4511-8C1B-C8AFB720664C}" type="datetimeFigureOut">
               <a:rPr lang="en-US" smtClean="0"/>
-              <a:t>4/9/2026</a:t>
+              <a:t>4/19/2026</a:t>
             </a:fld>
             <a:endParaRPr lang="en-US"/>
           </a:p>
@@ -2027,7 +2027,7 @@
           <a:p>
             <a:fld id="{6383FAE1-13DE-4511-8C1B-C8AFB720664C}" type="datetimeFigureOut">
               <a:rPr lang="en-US" smtClean="0"/>
-              <a:t>4/9/2026</a:t>
+              <a:t>4/19/2026</a:t>
             </a:fld>
             <a:endParaRPr lang="en-US"/>
           </a:p>
@@ -2302,7 +2302,7 @@
           <a:p>
             <a:fld id="{6383FAE1-13DE-4511-8C1B-C8AFB720664C}" type="datetimeFigureOut">
               <a:rPr lang="en-US" smtClean="0"/>
-              <a:t>4/9/2026</a:t>
+              <a:t>4/19/2026</a:t>
             </a:fld>
             <a:endParaRPr lang="en-US"/>
           </a:p>
@@ -2567,7 +2567,7 @@
           <a:p>
             <a:fld id="{6383FAE1-13DE-4511-8C1B-C8AFB720664C}" type="datetimeFigureOut">
               <a:rPr lang="en-US" smtClean="0"/>
-              <a:t>4/9/2026</a:t>
+              <a:t>4/19/2026</a:t>
             </a:fld>
             <a:endParaRPr lang="en-US"/>
           </a:p>
@@ -2979,7 +2979,7 @@
           <a:p>
             <a:fld id="{6383FAE1-13DE-4511-8C1B-C8AFB720664C}" type="datetimeFigureOut">
               <a:rPr lang="en-US" smtClean="0"/>
-              <a:t>4/9/2026</a:t>
+              <a:t>4/19/2026</a:t>
             </a:fld>
             <a:endParaRPr lang="en-US"/>
           </a:p>
@@ -3120,7 +3120,7 @@
           <a:p>
             <a:fld id="{6383FAE1-13DE-4511-8C1B-C8AFB720664C}" type="datetimeFigureOut">
               <a:rPr lang="en-US" smtClean="0"/>
-              <a:t>4/9/2026</a:t>
+              <a:t>4/19/2026</a:t>
             </a:fld>
             <a:endParaRPr lang="en-US"/>
           </a:p>
@@ -3233,7 +3233,7 @@
           <a:p>
             <a:fld id="{6383FAE1-13DE-4511-8C1B-C8AFB720664C}" type="datetimeFigureOut">
               <a:rPr lang="en-US" smtClean="0"/>
-              <a:t>4/9/2026</a:t>
+              <a:t>4/19/2026</a:t>
             </a:fld>
             <a:endParaRPr lang="en-US"/>
           </a:p>
@@ -3544,7 +3544,7 @@
           <a:p>
             <a:fld id="{6383FAE1-13DE-4511-8C1B-C8AFB720664C}" type="datetimeFigureOut">
               <a:rPr lang="en-US" smtClean="0"/>
-              <a:t>4/9/2026</a:t>
+              <a:t>4/19/2026</a:t>
             </a:fld>
             <a:endParaRPr lang="en-US"/>
           </a:p>
@@ -3835,7 +3835,7 @@
           <a:p>
             <a:fld id="{6383FAE1-13DE-4511-8C1B-C8AFB720664C}" type="datetimeFigureOut">
               <a:rPr lang="en-US" smtClean="0"/>
-              <a:t>4/9/2026</a:t>
+              <a:t>4/19/2026</a:t>
             </a:fld>
             <a:endParaRPr lang="en-US"/>
           </a:p>
@@ -4079,7 +4079,7 @@
           <a:p>
             <a:fld id="{6383FAE1-13DE-4511-8C1B-C8AFB720664C}" type="datetimeFigureOut">
               <a:rPr lang="en-US" smtClean="0"/>
-              <a:t>4/9/2026</a:t>
+              <a:t>4/19/2026</a:t>
             </a:fld>
             <a:endParaRPr lang="en-US"/>
           </a:p>
@@ -6166,7 +6166,7 @@
         <p:cNvPr id="1" name="">
           <a:extLst>
             <a:ext uri="{FF2B5EF4-FFF2-40B4-BE49-F238E27FC236}">
-              <a16:creationId xmlns:a16="http://schemas.microsoft.com/office/drawing/2014/main" id="{2A1FD7F3-200E-051E-C734-46986F01D077}"/>
+              <a16:creationId xmlns:a16="http://schemas.microsoft.com/office/drawing/2014/main" id="{F5F51A22-46BE-1F6F-D8FA-648E56EAEA3A}"/>
             </a:ext>
           </a:extLst>
         </p:cNvPr>
@@ -6186,7 +6186,7 @@
           <p:cNvPr id="6" name="TextBox 5">
             <a:extLst>
               <a:ext uri="{FF2B5EF4-FFF2-40B4-BE49-F238E27FC236}">
-                <a16:creationId xmlns:a16="http://schemas.microsoft.com/office/drawing/2014/main" id="{C6E1C713-F72D-D22E-CA9B-EB1C59A79116}"/>
+                <a16:creationId xmlns:a16="http://schemas.microsoft.com/office/drawing/2014/main" id="{0FCA147F-A3D4-70A6-97A9-1E879C373FE6}"/>
               </a:ext>
             </a:extLst>
           </p:cNvPr>
@@ -6195,8 +6195,8 @@
         </p:nvSpPr>
         <p:spPr>
           <a:xfrm>
-            <a:off x="374904" y="311557"/>
-            <a:ext cx="9564624" cy="3416320"/>
+            <a:off x="144233" y="156109"/>
+            <a:ext cx="1629703" cy="461665"/>
           </a:xfrm>
           <a:prstGeom prst="rect">
             <a:avLst/>
@@ -6218,41 +6218,853 @@
                   </a:schemeClr>
                 </a:solidFill>
               </a:rPr>
-              <a:t>Autocompletion by google in  </a:t>
-            </a:r>
-            <a:r>
-              <a:rPr lang="en-US" sz="2400" b="1" u="sng" dirty="0">
-                <a:solidFill>
-                  <a:schemeClr val="accent6">
-                    <a:lumMod val="60000"/>
-                    <a:lumOff val="40000"/>
-                  </a:schemeClr>
-                </a:solidFill>
-              </a:rPr>
-              <a:t>search/email</a:t>
-            </a:r>
-            <a:r>
-              <a:rPr lang="en-US" sz="2400" b="1" dirty="0">
-                <a:solidFill>
-                  <a:schemeClr val="accent6">
-                    <a:lumMod val="60000"/>
-                    <a:lumOff val="40000"/>
-                  </a:schemeClr>
-                </a:solidFill>
-              </a:rPr>
-              <a:t>:</a:t>
-            </a:r>
-          </a:p>
-          <a:p>
-            <a:endParaRPr lang="en-US" sz="2400" dirty="0">
-              <a:solidFill>
-                <a:schemeClr val="accent6">
-                  <a:lumMod val="60000"/>
-                  <a:lumOff val="40000"/>
-                </a:schemeClr>
-              </a:solidFill>
-            </a:endParaRPr>
-          </a:p>
+              <a:t>RNN Types</a:t>
+            </a:r>
+          </a:p>
+        </p:txBody>
+      </p:sp>
+      <p:sp>
+        <p:nvSpPr>
+          <p:cNvPr id="2" name="Rectangle 1">
+            <a:extLst>
+              <a:ext uri="{FF2B5EF4-FFF2-40B4-BE49-F238E27FC236}">
+                <a16:creationId xmlns:a16="http://schemas.microsoft.com/office/drawing/2014/main" id="{77A7783A-6811-51FF-1F44-FFA4D9182A82}"/>
+              </a:ext>
+            </a:extLst>
+          </p:cNvPr>
+          <p:cNvSpPr/>
+          <p:nvPr/>
+        </p:nvSpPr>
+        <p:spPr>
+          <a:xfrm>
+            <a:off x="566928" y="2382118"/>
+            <a:ext cx="530352" cy="461665"/>
+          </a:xfrm>
+          <a:prstGeom prst="rect">
+            <a:avLst/>
+          </a:prstGeom>
+          <a:solidFill>
+            <a:schemeClr val="accent4"/>
+          </a:solidFill>
+        </p:spPr>
+        <p:style>
+          <a:lnRef idx="2">
+            <a:schemeClr val="accent1">
+              <a:shade val="15000"/>
+            </a:schemeClr>
+          </a:lnRef>
+          <a:fillRef idx="1">
+            <a:schemeClr val="accent1"/>
+          </a:fillRef>
+          <a:effectRef idx="0">
+            <a:schemeClr val="accent1"/>
+          </a:effectRef>
+          <a:fontRef idx="minor">
+            <a:schemeClr val="lt1"/>
+          </a:fontRef>
+        </p:style>
+        <p:txBody>
+          <a:bodyPr rtlCol="0" anchor="ctr"/>
+          <a:lstStyle/>
+          <a:p>
+            <a:pPr algn="ctr"/>
+            <a:endParaRPr lang="en-US"/>
+          </a:p>
+        </p:txBody>
+      </p:sp>
+      <p:sp>
+        <p:nvSpPr>
+          <p:cNvPr id="3" name="Rectangle 2">
+            <a:extLst>
+              <a:ext uri="{FF2B5EF4-FFF2-40B4-BE49-F238E27FC236}">
+                <a16:creationId xmlns:a16="http://schemas.microsoft.com/office/drawing/2014/main" id="{FD454EE3-B654-C124-BC48-91272625803E}"/>
+              </a:ext>
+            </a:extLst>
+          </p:cNvPr>
+          <p:cNvSpPr/>
+          <p:nvPr/>
+        </p:nvSpPr>
+        <p:spPr>
+          <a:xfrm>
+            <a:off x="1624583" y="2382118"/>
+            <a:ext cx="530352" cy="461665"/>
+          </a:xfrm>
+          <a:prstGeom prst="rect">
+            <a:avLst/>
+          </a:prstGeom>
+          <a:solidFill>
+            <a:schemeClr val="accent4"/>
+          </a:solidFill>
+        </p:spPr>
+        <p:style>
+          <a:lnRef idx="2">
+            <a:schemeClr val="accent1">
+              <a:shade val="15000"/>
+            </a:schemeClr>
+          </a:lnRef>
+          <a:fillRef idx="1">
+            <a:schemeClr val="accent1"/>
+          </a:fillRef>
+          <a:effectRef idx="0">
+            <a:schemeClr val="accent1"/>
+          </a:effectRef>
+          <a:fontRef idx="minor">
+            <a:schemeClr val="lt1"/>
+          </a:fontRef>
+        </p:style>
+        <p:txBody>
+          <a:bodyPr rtlCol="0" anchor="ctr"/>
+          <a:lstStyle/>
+          <a:p>
+            <a:pPr algn="ctr"/>
+            <a:endParaRPr lang="en-US"/>
+          </a:p>
+        </p:txBody>
+      </p:sp>
+      <p:sp>
+        <p:nvSpPr>
+          <p:cNvPr id="7" name="Rectangle 6">
+            <a:extLst>
+              <a:ext uri="{FF2B5EF4-FFF2-40B4-BE49-F238E27FC236}">
+                <a16:creationId xmlns:a16="http://schemas.microsoft.com/office/drawing/2014/main" id="{D4F8DE2B-4FE5-F7AB-50BE-A7D1E86B7D78}"/>
+              </a:ext>
+            </a:extLst>
+          </p:cNvPr>
+          <p:cNvSpPr/>
+          <p:nvPr/>
+        </p:nvSpPr>
+        <p:spPr>
+          <a:xfrm>
+            <a:off x="2588238" y="2382118"/>
+            <a:ext cx="530352" cy="461665"/>
+          </a:xfrm>
+          <a:prstGeom prst="rect">
+            <a:avLst/>
+          </a:prstGeom>
+          <a:solidFill>
+            <a:schemeClr val="accent4"/>
+          </a:solidFill>
+        </p:spPr>
+        <p:style>
+          <a:lnRef idx="2">
+            <a:schemeClr val="accent1">
+              <a:shade val="15000"/>
+            </a:schemeClr>
+          </a:lnRef>
+          <a:fillRef idx="1">
+            <a:schemeClr val="accent1"/>
+          </a:fillRef>
+          <a:effectRef idx="0">
+            <a:schemeClr val="accent1"/>
+          </a:effectRef>
+          <a:fontRef idx="minor">
+            <a:schemeClr val="lt1"/>
+          </a:fontRef>
+        </p:style>
+        <p:txBody>
+          <a:bodyPr rtlCol="0" anchor="ctr"/>
+          <a:lstStyle/>
+          <a:p>
+            <a:pPr algn="ctr"/>
+            <a:endParaRPr lang="en-US"/>
+          </a:p>
+        </p:txBody>
+      </p:sp>
+      <p:sp>
+        <p:nvSpPr>
+          <p:cNvPr id="8" name="Rectangle 7">
+            <a:extLst>
+              <a:ext uri="{FF2B5EF4-FFF2-40B4-BE49-F238E27FC236}">
+                <a16:creationId xmlns:a16="http://schemas.microsoft.com/office/drawing/2014/main" id="{11EFDC35-95F2-2DC5-9685-1908C3056682}"/>
+              </a:ext>
+            </a:extLst>
+          </p:cNvPr>
+          <p:cNvSpPr/>
+          <p:nvPr/>
+        </p:nvSpPr>
+        <p:spPr>
+          <a:xfrm>
+            <a:off x="566928" y="3284774"/>
+            <a:ext cx="530352" cy="1137874"/>
+          </a:xfrm>
+          <a:prstGeom prst="rect">
+            <a:avLst/>
+          </a:prstGeom>
+          <a:solidFill>
+            <a:schemeClr val="accent2">
+              <a:lumMod val="75000"/>
+            </a:schemeClr>
+          </a:solidFill>
+        </p:spPr>
+        <p:style>
+          <a:lnRef idx="2">
+            <a:schemeClr val="accent1">
+              <a:shade val="15000"/>
+            </a:schemeClr>
+          </a:lnRef>
+          <a:fillRef idx="1">
+            <a:schemeClr val="accent1"/>
+          </a:fillRef>
+          <a:effectRef idx="0">
+            <a:schemeClr val="accent1"/>
+          </a:effectRef>
+          <a:fontRef idx="minor">
+            <a:schemeClr val="lt1"/>
+          </a:fontRef>
+        </p:style>
+        <p:txBody>
+          <a:bodyPr rtlCol="0" anchor="ctr"/>
+          <a:lstStyle/>
+          <a:p>
+            <a:pPr algn="ctr"/>
+            <a:endParaRPr lang="en-US"/>
+          </a:p>
+        </p:txBody>
+      </p:sp>
+      <p:sp>
+        <p:nvSpPr>
+          <p:cNvPr id="10" name="Rectangle 9">
+            <a:extLst>
+              <a:ext uri="{FF2B5EF4-FFF2-40B4-BE49-F238E27FC236}">
+                <a16:creationId xmlns:a16="http://schemas.microsoft.com/office/drawing/2014/main" id="{C04380B2-D887-6561-5480-44EAC61ECC22}"/>
+              </a:ext>
+            </a:extLst>
+          </p:cNvPr>
+          <p:cNvSpPr/>
+          <p:nvPr/>
+        </p:nvSpPr>
+        <p:spPr>
+          <a:xfrm>
+            <a:off x="1624583" y="3284774"/>
+            <a:ext cx="530352" cy="1137874"/>
+          </a:xfrm>
+          <a:prstGeom prst="rect">
+            <a:avLst/>
+          </a:prstGeom>
+          <a:solidFill>
+            <a:schemeClr val="accent2">
+              <a:lumMod val="75000"/>
+            </a:schemeClr>
+          </a:solidFill>
+        </p:spPr>
+        <p:style>
+          <a:lnRef idx="2">
+            <a:schemeClr val="accent1">
+              <a:shade val="15000"/>
+            </a:schemeClr>
+          </a:lnRef>
+          <a:fillRef idx="1">
+            <a:schemeClr val="accent1"/>
+          </a:fillRef>
+          <a:effectRef idx="0">
+            <a:schemeClr val="accent1"/>
+          </a:effectRef>
+          <a:fontRef idx="minor">
+            <a:schemeClr val="lt1"/>
+          </a:fontRef>
+        </p:style>
+        <p:txBody>
+          <a:bodyPr rtlCol="0" anchor="ctr"/>
+          <a:lstStyle/>
+          <a:p>
+            <a:pPr algn="ctr"/>
+            <a:endParaRPr lang="en-US"/>
+          </a:p>
+        </p:txBody>
+      </p:sp>
+      <p:sp>
+        <p:nvSpPr>
+          <p:cNvPr id="11" name="Rectangle 10">
+            <a:extLst>
+              <a:ext uri="{FF2B5EF4-FFF2-40B4-BE49-F238E27FC236}">
+                <a16:creationId xmlns:a16="http://schemas.microsoft.com/office/drawing/2014/main" id="{F9674CB0-297D-05A1-3CA1-45CC2A8578CA}"/>
+              </a:ext>
+            </a:extLst>
+          </p:cNvPr>
+          <p:cNvSpPr/>
+          <p:nvPr/>
+        </p:nvSpPr>
+        <p:spPr>
+          <a:xfrm>
+            <a:off x="2588238" y="3284774"/>
+            <a:ext cx="530352" cy="1137874"/>
+          </a:xfrm>
+          <a:prstGeom prst="rect">
+            <a:avLst/>
+          </a:prstGeom>
+          <a:solidFill>
+            <a:schemeClr val="accent2">
+              <a:lumMod val="75000"/>
+            </a:schemeClr>
+          </a:solidFill>
+        </p:spPr>
+        <p:style>
+          <a:lnRef idx="2">
+            <a:schemeClr val="accent1">
+              <a:shade val="15000"/>
+            </a:schemeClr>
+          </a:lnRef>
+          <a:fillRef idx="1">
+            <a:schemeClr val="accent1"/>
+          </a:fillRef>
+          <a:effectRef idx="0">
+            <a:schemeClr val="accent1"/>
+          </a:effectRef>
+          <a:fontRef idx="minor">
+            <a:schemeClr val="lt1"/>
+          </a:fontRef>
+        </p:style>
+        <p:txBody>
+          <a:bodyPr rtlCol="0" anchor="ctr"/>
+          <a:lstStyle/>
+          <a:p>
+            <a:pPr algn="ctr"/>
+            <a:endParaRPr lang="en-US"/>
+          </a:p>
+        </p:txBody>
+      </p:sp>
+      <p:sp>
+        <p:nvSpPr>
+          <p:cNvPr id="12" name="Rectangle 11">
+            <a:extLst>
+              <a:ext uri="{FF2B5EF4-FFF2-40B4-BE49-F238E27FC236}">
+                <a16:creationId xmlns:a16="http://schemas.microsoft.com/office/drawing/2014/main" id="{20A64EEF-3D0C-145D-4208-DE1A19FC0828}"/>
+              </a:ext>
+            </a:extLst>
+          </p:cNvPr>
+          <p:cNvSpPr/>
+          <p:nvPr/>
+        </p:nvSpPr>
+        <p:spPr>
+          <a:xfrm>
+            <a:off x="566928" y="4874722"/>
+            <a:ext cx="530352" cy="554736"/>
+          </a:xfrm>
+          <a:prstGeom prst="rect">
+            <a:avLst/>
+          </a:prstGeom>
+          <a:solidFill>
+            <a:srgbClr val="92D050"/>
+          </a:solidFill>
+        </p:spPr>
+        <p:style>
+          <a:lnRef idx="2">
+            <a:schemeClr val="accent1">
+              <a:shade val="15000"/>
+            </a:schemeClr>
+          </a:lnRef>
+          <a:fillRef idx="1">
+            <a:schemeClr val="accent1"/>
+          </a:fillRef>
+          <a:effectRef idx="0">
+            <a:schemeClr val="accent1"/>
+          </a:effectRef>
+          <a:fontRef idx="minor">
+            <a:schemeClr val="lt1"/>
+          </a:fontRef>
+        </p:style>
+        <p:txBody>
+          <a:bodyPr rtlCol="0" anchor="ctr"/>
+          <a:lstStyle/>
+          <a:p>
+            <a:pPr algn="ctr"/>
+            <a:endParaRPr lang="en-US"/>
+          </a:p>
+        </p:txBody>
+      </p:sp>
+      <p:sp>
+        <p:nvSpPr>
+          <p:cNvPr id="13" name="Rectangle 12">
+            <a:extLst>
+              <a:ext uri="{FF2B5EF4-FFF2-40B4-BE49-F238E27FC236}">
+                <a16:creationId xmlns:a16="http://schemas.microsoft.com/office/drawing/2014/main" id="{FD8C6CB9-BBC5-0235-ABC1-9CC5E1F5EB34}"/>
+              </a:ext>
+            </a:extLst>
+          </p:cNvPr>
+          <p:cNvSpPr/>
+          <p:nvPr/>
+        </p:nvSpPr>
+        <p:spPr>
+          <a:xfrm>
+            <a:off x="1624583" y="4874722"/>
+            <a:ext cx="530352" cy="554736"/>
+          </a:xfrm>
+          <a:prstGeom prst="rect">
+            <a:avLst/>
+          </a:prstGeom>
+          <a:solidFill>
+            <a:srgbClr val="92D050"/>
+          </a:solidFill>
+        </p:spPr>
+        <p:style>
+          <a:lnRef idx="2">
+            <a:schemeClr val="accent1">
+              <a:shade val="15000"/>
+            </a:schemeClr>
+          </a:lnRef>
+          <a:fillRef idx="1">
+            <a:schemeClr val="accent1"/>
+          </a:fillRef>
+          <a:effectRef idx="0">
+            <a:schemeClr val="accent1"/>
+          </a:effectRef>
+          <a:fontRef idx="minor">
+            <a:schemeClr val="lt1"/>
+          </a:fontRef>
+        </p:style>
+        <p:txBody>
+          <a:bodyPr rtlCol="0" anchor="ctr"/>
+          <a:lstStyle/>
+          <a:p>
+            <a:pPr algn="ctr"/>
+            <a:endParaRPr lang="en-US"/>
+          </a:p>
+        </p:txBody>
+      </p:sp>
+      <p:sp>
+        <p:nvSpPr>
+          <p:cNvPr id="14" name="Rectangle 13">
+            <a:extLst>
+              <a:ext uri="{FF2B5EF4-FFF2-40B4-BE49-F238E27FC236}">
+                <a16:creationId xmlns:a16="http://schemas.microsoft.com/office/drawing/2014/main" id="{7407D085-0C4B-6B6D-8CA9-87E4308AA03B}"/>
+              </a:ext>
+            </a:extLst>
+          </p:cNvPr>
+          <p:cNvSpPr/>
+          <p:nvPr/>
+        </p:nvSpPr>
+        <p:spPr>
+          <a:xfrm>
+            <a:off x="2588238" y="4874722"/>
+            <a:ext cx="530352" cy="554736"/>
+          </a:xfrm>
+          <a:prstGeom prst="rect">
+            <a:avLst/>
+          </a:prstGeom>
+          <a:solidFill>
+            <a:srgbClr val="92D050"/>
+          </a:solidFill>
+        </p:spPr>
+        <p:style>
+          <a:lnRef idx="2">
+            <a:schemeClr val="accent1">
+              <a:shade val="15000"/>
+            </a:schemeClr>
+          </a:lnRef>
+          <a:fillRef idx="1">
+            <a:schemeClr val="accent1"/>
+          </a:fillRef>
+          <a:effectRef idx="0">
+            <a:schemeClr val="accent1"/>
+          </a:effectRef>
+          <a:fontRef idx="minor">
+            <a:schemeClr val="lt1"/>
+          </a:fontRef>
+        </p:style>
+        <p:txBody>
+          <a:bodyPr rtlCol="0" anchor="ctr"/>
+          <a:lstStyle/>
+          <a:p>
+            <a:pPr algn="ctr"/>
+            <a:endParaRPr lang="en-US"/>
+          </a:p>
+        </p:txBody>
+      </p:sp>
+      <p:sp>
+        <p:nvSpPr>
+          <p:cNvPr id="15" name="Arrow: Right 14">
+            <a:extLst>
+              <a:ext uri="{FF2B5EF4-FFF2-40B4-BE49-F238E27FC236}">
+                <a16:creationId xmlns:a16="http://schemas.microsoft.com/office/drawing/2014/main" id="{EFA11273-2B1C-1DA9-A999-419FA2FDB56B}"/>
+              </a:ext>
+            </a:extLst>
+          </p:cNvPr>
+          <p:cNvSpPr/>
+          <p:nvPr/>
+        </p:nvSpPr>
+        <p:spPr>
+          <a:xfrm rot="16200000">
+            <a:off x="638373" y="2815933"/>
+            <a:ext cx="405966" cy="461665"/>
+          </a:xfrm>
+          <a:prstGeom prst="rightArrow">
+            <a:avLst/>
+          </a:prstGeom>
+        </p:spPr>
+        <p:style>
+          <a:lnRef idx="2">
+            <a:schemeClr val="accent1">
+              <a:shade val="15000"/>
+            </a:schemeClr>
+          </a:lnRef>
+          <a:fillRef idx="1">
+            <a:schemeClr val="accent1"/>
+          </a:fillRef>
+          <a:effectRef idx="0">
+            <a:schemeClr val="accent1"/>
+          </a:effectRef>
+          <a:fontRef idx="minor">
+            <a:schemeClr val="lt1"/>
+          </a:fontRef>
+        </p:style>
+        <p:txBody>
+          <a:bodyPr rtlCol="0" anchor="ctr"/>
+          <a:lstStyle/>
+          <a:p>
+            <a:pPr algn="ctr"/>
+            <a:endParaRPr lang="en-US"/>
+          </a:p>
+        </p:txBody>
+      </p:sp>
+      <p:sp>
+        <p:nvSpPr>
+          <p:cNvPr id="16" name="Arrow: Right 15">
+            <a:extLst>
+              <a:ext uri="{FF2B5EF4-FFF2-40B4-BE49-F238E27FC236}">
+                <a16:creationId xmlns:a16="http://schemas.microsoft.com/office/drawing/2014/main" id="{17F9572D-6AA2-CD26-EAF0-09A579968953}"/>
+              </a:ext>
+            </a:extLst>
+          </p:cNvPr>
+          <p:cNvSpPr/>
+          <p:nvPr/>
+        </p:nvSpPr>
+        <p:spPr>
+          <a:xfrm rot="16200000">
+            <a:off x="1686776" y="2804851"/>
+            <a:ext cx="405966" cy="461665"/>
+          </a:xfrm>
+          <a:prstGeom prst="rightArrow">
+            <a:avLst/>
+          </a:prstGeom>
+        </p:spPr>
+        <p:style>
+          <a:lnRef idx="2">
+            <a:schemeClr val="accent1">
+              <a:shade val="15000"/>
+            </a:schemeClr>
+          </a:lnRef>
+          <a:fillRef idx="1">
+            <a:schemeClr val="accent1"/>
+          </a:fillRef>
+          <a:effectRef idx="0">
+            <a:schemeClr val="accent1"/>
+          </a:effectRef>
+          <a:fontRef idx="minor">
+            <a:schemeClr val="lt1"/>
+          </a:fontRef>
+        </p:style>
+        <p:txBody>
+          <a:bodyPr rtlCol="0" anchor="ctr"/>
+          <a:lstStyle/>
+          <a:p>
+            <a:pPr algn="ctr"/>
+            <a:endParaRPr lang="en-US"/>
+          </a:p>
+        </p:txBody>
+      </p:sp>
+      <p:sp>
+        <p:nvSpPr>
+          <p:cNvPr id="17" name="Arrow: Right 16">
+            <a:extLst>
+              <a:ext uri="{FF2B5EF4-FFF2-40B4-BE49-F238E27FC236}">
+                <a16:creationId xmlns:a16="http://schemas.microsoft.com/office/drawing/2014/main" id="{FF4A9012-49CF-B0BF-44DE-892364756D13}"/>
+              </a:ext>
+            </a:extLst>
+          </p:cNvPr>
+          <p:cNvSpPr/>
+          <p:nvPr/>
+        </p:nvSpPr>
+        <p:spPr>
+          <a:xfrm rot="16200000">
+            <a:off x="2684775" y="2804851"/>
+            <a:ext cx="405966" cy="461665"/>
+          </a:xfrm>
+          <a:prstGeom prst="rightArrow">
+            <a:avLst/>
+          </a:prstGeom>
+        </p:spPr>
+        <p:style>
+          <a:lnRef idx="2">
+            <a:schemeClr val="accent1">
+              <a:shade val="15000"/>
+            </a:schemeClr>
+          </a:lnRef>
+          <a:fillRef idx="1">
+            <a:schemeClr val="accent1"/>
+          </a:fillRef>
+          <a:effectRef idx="0">
+            <a:schemeClr val="accent1"/>
+          </a:effectRef>
+          <a:fontRef idx="minor">
+            <a:schemeClr val="lt1"/>
+          </a:fontRef>
+        </p:style>
+        <p:txBody>
+          <a:bodyPr rtlCol="0" anchor="ctr"/>
+          <a:lstStyle/>
+          <a:p>
+            <a:pPr algn="ctr"/>
+            <a:endParaRPr lang="en-US"/>
+          </a:p>
+        </p:txBody>
+      </p:sp>
+      <p:sp>
+        <p:nvSpPr>
+          <p:cNvPr id="18" name="Arrow: Right 17">
+            <a:extLst>
+              <a:ext uri="{FF2B5EF4-FFF2-40B4-BE49-F238E27FC236}">
+                <a16:creationId xmlns:a16="http://schemas.microsoft.com/office/drawing/2014/main" id="{83C7E23E-B8D4-F382-7B47-5F6DEF24A9DE}"/>
+              </a:ext>
+            </a:extLst>
+          </p:cNvPr>
+          <p:cNvSpPr/>
+          <p:nvPr/>
+        </p:nvSpPr>
+        <p:spPr>
+          <a:xfrm rot="16200000">
+            <a:off x="638372" y="4405880"/>
+            <a:ext cx="405966" cy="461665"/>
+          </a:xfrm>
+          <a:prstGeom prst="rightArrow">
+            <a:avLst/>
+          </a:prstGeom>
+        </p:spPr>
+        <p:style>
+          <a:lnRef idx="2">
+            <a:schemeClr val="accent1">
+              <a:shade val="15000"/>
+            </a:schemeClr>
+          </a:lnRef>
+          <a:fillRef idx="1">
+            <a:schemeClr val="accent1"/>
+          </a:fillRef>
+          <a:effectRef idx="0">
+            <a:schemeClr val="accent1"/>
+          </a:effectRef>
+          <a:fontRef idx="minor">
+            <a:schemeClr val="lt1"/>
+          </a:fontRef>
+        </p:style>
+        <p:txBody>
+          <a:bodyPr rtlCol="0" anchor="ctr"/>
+          <a:lstStyle/>
+          <a:p>
+            <a:pPr algn="ctr"/>
+            <a:endParaRPr lang="en-US"/>
+          </a:p>
+        </p:txBody>
+      </p:sp>
+      <p:sp>
+        <p:nvSpPr>
+          <p:cNvPr id="19" name="Arrow: Right 18">
+            <a:extLst>
+              <a:ext uri="{FF2B5EF4-FFF2-40B4-BE49-F238E27FC236}">
+                <a16:creationId xmlns:a16="http://schemas.microsoft.com/office/drawing/2014/main" id="{E4B0BEA2-8FC1-D318-78CE-F60AF5759215}"/>
+              </a:ext>
+            </a:extLst>
+          </p:cNvPr>
+          <p:cNvSpPr/>
+          <p:nvPr/>
+        </p:nvSpPr>
+        <p:spPr>
+          <a:xfrm rot="16200000">
+            <a:off x="1686775" y="4394798"/>
+            <a:ext cx="405966" cy="461665"/>
+          </a:xfrm>
+          <a:prstGeom prst="rightArrow">
+            <a:avLst/>
+          </a:prstGeom>
+        </p:spPr>
+        <p:style>
+          <a:lnRef idx="2">
+            <a:schemeClr val="accent1">
+              <a:shade val="15000"/>
+            </a:schemeClr>
+          </a:lnRef>
+          <a:fillRef idx="1">
+            <a:schemeClr val="accent1"/>
+          </a:fillRef>
+          <a:effectRef idx="0">
+            <a:schemeClr val="accent1"/>
+          </a:effectRef>
+          <a:fontRef idx="minor">
+            <a:schemeClr val="lt1"/>
+          </a:fontRef>
+        </p:style>
+        <p:txBody>
+          <a:bodyPr rtlCol="0" anchor="ctr"/>
+          <a:lstStyle/>
+          <a:p>
+            <a:pPr algn="ctr"/>
+            <a:endParaRPr lang="en-US"/>
+          </a:p>
+        </p:txBody>
+      </p:sp>
+      <p:sp>
+        <p:nvSpPr>
+          <p:cNvPr id="20" name="Arrow: Right 19">
+            <a:extLst>
+              <a:ext uri="{FF2B5EF4-FFF2-40B4-BE49-F238E27FC236}">
+                <a16:creationId xmlns:a16="http://schemas.microsoft.com/office/drawing/2014/main" id="{AE3262B7-C7B5-21AE-2F7F-97B367DC8BD9}"/>
+              </a:ext>
+            </a:extLst>
+          </p:cNvPr>
+          <p:cNvSpPr/>
+          <p:nvPr/>
+        </p:nvSpPr>
+        <p:spPr>
+          <a:xfrm rot="16200000">
+            <a:off x="2684774" y="4394798"/>
+            <a:ext cx="405966" cy="461665"/>
+          </a:xfrm>
+          <a:prstGeom prst="rightArrow">
+            <a:avLst/>
+          </a:prstGeom>
+        </p:spPr>
+        <p:style>
+          <a:lnRef idx="2">
+            <a:schemeClr val="accent1">
+              <a:shade val="15000"/>
+            </a:schemeClr>
+          </a:lnRef>
+          <a:fillRef idx="1">
+            <a:schemeClr val="accent1"/>
+          </a:fillRef>
+          <a:effectRef idx="0">
+            <a:schemeClr val="accent1"/>
+          </a:effectRef>
+          <a:fontRef idx="minor">
+            <a:schemeClr val="lt1"/>
+          </a:fontRef>
+        </p:style>
+        <p:txBody>
+          <a:bodyPr rtlCol="0" anchor="ctr"/>
+          <a:lstStyle/>
+          <a:p>
+            <a:pPr algn="ctr"/>
+            <a:endParaRPr lang="en-US"/>
+          </a:p>
+        </p:txBody>
+      </p:sp>
+      <p:sp>
+        <p:nvSpPr>
+          <p:cNvPr id="21" name="Arrow: Right 20">
+            <a:extLst>
+              <a:ext uri="{FF2B5EF4-FFF2-40B4-BE49-F238E27FC236}">
+                <a16:creationId xmlns:a16="http://schemas.microsoft.com/office/drawing/2014/main" id="{9414303A-51A5-4F5D-8101-A6C1FA79010A}"/>
+              </a:ext>
+            </a:extLst>
+          </p:cNvPr>
+          <p:cNvSpPr/>
+          <p:nvPr/>
+        </p:nvSpPr>
+        <p:spPr>
+          <a:xfrm>
+            <a:off x="1178992" y="3708016"/>
+            <a:ext cx="393192" cy="291389"/>
+          </a:xfrm>
+          <a:prstGeom prst="rightArrow">
+            <a:avLst/>
+          </a:prstGeom>
+        </p:spPr>
+        <p:style>
+          <a:lnRef idx="2">
+            <a:schemeClr val="accent1">
+              <a:shade val="15000"/>
+            </a:schemeClr>
+          </a:lnRef>
+          <a:fillRef idx="1">
+            <a:schemeClr val="accent1"/>
+          </a:fillRef>
+          <a:effectRef idx="0">
+            <a:schemeClr val="accent1"/>
+          </a:effectRef>
+          <a:fontRef idx="minor">
+            <a:schemeClr val="lt1"/>
+          </a:fontRef>
+        </p:style>
+        <p:txBody>
+          <a:bodyPr rtlCol="0" anchor="ctr"/>
+          <a:lstStyle/>
+          <a:p>
+            <a:pPr algn="ctr"/>
+            <a:endParaRPr lang="en-US"/>
+          </a:p>
+        </p:txBody>
+      </p:sp>
+      <p:sp>
+        <p:nvSpPr>
+          <p:cNvPr id="22" name="Arrow: Right 21">
+            <a:extLst>
+              <a:ext uri="{FF2B5EF4-FFF2-40B4-BE49-F238E27FC236}">
+                <a16:creationId xmlns:a16="http://schemas.microsoft.com/office/drawing/2014/main" id="{99E783A7-392D-9D16-BF5F-690D7F33F62C}"/>
+              </a:ext>
+            </a:extLst>
+          </p:cNvPr>
+          <p:cNvSpPr/>
+          <p:nvPr/>
+        </p:nvSpPr>
+        <p:spPr>
+          <a:xfrm>
+            <a:off x="2195046" y="3722829"/>
+            <a:ext cx="393192" cy="291389"/>
+          </a:xfrm>
+          <a:prstGeom prst="rightArrow">
+            <a:avLst/>
+          </a:prstGeom>
+        </p:spPr>
+        <p:style>
+          <a:lnRef idx="2">
+            <a:schemeClr val="accent1">
+              <a:shade val="15000"/>
+            </a:schemeClr>
+          </a:lnRef>
+          <a:fillRef idx="1">
+            <a:schemeClr val="accent1"/>
+          </a:fillRef>
+          <a:effectRef idx="0">
+            <a:schemeClr val="accent1"/>
+          </a:effectRef>
+          <a:fontRef idx="minor">
+            <a:schemeClr val="lt1"/>
+          </a:fontRef>
+        </p:style>
+        <p:txBody>
+          <a:bodyPr rtlCol="0" anchor="ctr"/>
+          <a:lstStyle/>
+          <a:p>
+            <a:pPr algn="ctr"/>
+            <a:endParaRPr lang="en-US"/>
+          </a:p>
+        </p:txBody>
+      </p:sp>
+      <p:sp>
+        <p:nvSpPr>
+          <p:cNvPr id="23" name="TextBox 22">
+            <a:extLst>
+              <a:ext uri="{FF2B5EF4-FFF2-40B4-BE49-F238E27FC236}">
+                <a16:creationId xmlns:a16="http://schemas.microsoft.com/office/drawing/2014/main" id="{A244F1A8-4526-3037-AF08-E4BED84B9118}"/>
+              </a:ext>
+            </a:extLst>
+          </p:cNvPr>
+          <p:cNvSpPr txBox="1"/>
+          <p:nvPr/>
+        </p:nvSpPr>
+        <p:spPr>
+          <a:xfrm>
+            <a:off x="752006" y="1885427"/>
+            <a:ext cx="1978427" cy="461665"/>
+          </a:xfrm>
+          <a:prstGeom prst="rect">
+            <a:avLst/>
+          </a:prstGeom>
+          <a:noFill/>
+        </p:spPr>
+        <p:txBody>
+          <a:bodyPr wrap="none" rtlCol="0">
+            <a:spAutoFit/>
+          </a:bodyPr>
+          <a:lstStyle/>
           <a:p>
             <a:r>
               <a:rPr lang="en-US" sz="2400" dirty="0">
@@ -6263,19 +7075,663 @@
                   </a:schemeClr>
                 </a:solidFill>
               </a:rPr>
-              <a:t>I want to understand deep  ____   -&gt; learning</a:t>
-            </a:r>
-          </a:p>
-          <a:p>
-            <a:endParaRPr lang="en-US" sz="2400" dirty="0">
-              <a:solidFill>
-                <a:schemeClr val="accent6">
-                  <a:lumMod val="60000"/>
-                  <a:lumOff val="40000"/>
-                </a:schemeClr>
-              </a:solidFill>
-            </a:endParaRPr>
-          </a:p>
+              <a:t>Many to many</a:t>
+            </a:r>
+          </a:p>
+        </p:txBody>
+      </p:sp>
+      <p:sp>
+        <p:nvSpPr>
+          <p:cNvPr id="26" name="Rectangle 25">
+            <a:extLst>
+              <a:ext uri="{FF2B5EF4-FFF2-40B4-BE49-F238E27FC236}">
+                <a16:creationId xmlns:a16="http://schemas.microsoft.com/office/drawing/2014/main" id="{5DEC97FB-2EB3-6FFB-D939-0ACB2E377530}"/>
+              </a:ext>
+            </a:extLst>
+          </p:cNvPr>
+          <p:cNvSpPr/>
+          <p:nvPr/>
+        </p:nvSpPr>
+        <p:spPr>
+          <a:xfrm>
+            <a:off x="6316649" y="2409160"/>
+            <a:ext cx="530352" cy="461665"/>
+          </a:xfrm>
+          <a:prstGeom prst="rect">
+            <a:avLst/>
+          </a:prstGeom>
+          <a:solidFill>
+            <a:schemeClr val="accent4"/>
+          </a:solidFill>
+        </p:spPr>
+        <p:style>
+          <a:lnRef idx="2">
+            <a:schemeClr val="accent1">
+              <a:shade val="15000"/>
+            </a:schemeClr>
+          </a:lnRef>
+          <a:fillRef idx="1">
+            <a:schemeClr val="accent1"/>
+          </a:fillRef>
+          <a:effectRef idx="0">
+            <a:schemeClr val="accent1"/>
+          </a:effectRef>
+          <a:fontRef idx="minor">
+            <a:schemeClr val="lt1"/>
+          </a:fontRef>
+        </p:style>
+        <p:txBody>
+          <a:bodyPr rtlCol="0" anchor="ctr"/>
+          <a:lstStyle/>
+          <a:p>
+            <a:pPr algn="ctr"/>
+            <a:endParaRPr lang="en-US"/>
+          </a:p>
+        </p:txBody>
+      </p:sp>
+      <p:sp>
+        <p:nvSpPr>
+          <p:cNvPr id="27" name="Rectangle 26">
+            <a:extLst>
+              <a:ext uri="{FF2B5EF4-FFF2-40B4-BE49-F238E27FC236}">
+                <a16:creationId xmlns:a16="http://schemas.microsoft.com/office/drawing/2014/main" id="{99F585BE-B2D4-7C88-BD81-9DF983BE74DF}"/>
+              </a:ext>
+            </a:extLst>
+          </p:cNvPr>
+          <p:cNvSpPr/>
+          <p:nvPr/>
+        </p:nvSpPr>
+        <p:spPr>
+          <a:xfrm>
+            <a:off x="4295339" y="3311816"/>
+            <a:ext cx="530352" cy="1137874"/>
+          </a:xfrm>
+          <a:prstGeom prst="rect">
+            <a:avLst/>
+          </a:prstGeom>
+          <a:solidFill>
+            <a:schemeClr val="accent2">
+              <a:lumMod val="75000"/>
+            </a:schemeClr>
+          </a:solidFill>
+        </p:spPr>
+        <p:style>
+          <a:lnRef idx="2">
+            <a:schemeClr val="accent1">
+              <a:shade val="15000"/>
+            </a:schemeClr>
+          </a:lnRef>
+          <a:fillRef idx="1">
+            <a:schemeClr val="accent1"/>
+          </a:fillRef>
+          <a:effectRef idx="0">
+            <a:schemeClr val="accent1"/>
+          </a:effectRef>
+          <a:fontRef idx="minor">
+            <a:schemeClr val="lt1"/>
+          </a:fontRef>
+        </p:style>
+        <p:txBody>
+          <a:bodyPr rtlCol="0" anchor="ctr"/>
+          <a:lstStyle/>
+          <a:p>
+            <a:pPr algn="ctr"/>
+            <a:endParaRPr lang="en-US"/>
+          </a:p>
+        </p:txBody>
+      </p:sp>
+      <p:sp>
+        <p:nvSpPr>
+          <p:cNvPr id="28" name="Rectangle 27">
+            <a:extLst>
+              <a:ext uri="{FF2B5EF4-FFF2-40B4-BE49-F238E27FC236}">
+                <a16:creationId xmlns:a16="http://schemas.microsoft.com/office/drawing/2014/main" id="{62937FA8-D56F-18E5-4265-71A3817F1DF0}"/>
+              </a:ext>
+            </a:extLst>
+          </p:cNvPr>
+          <p:cNvSpPr/>
+          <p:nvPr/>
+        </p:nvSpPr>
+        <p:spPr>
+          <a:xfrm>
+            <a:off x="5352994" y="3311816"/>
+            <a:ext cx="530352" cy="1137874"/>
+          </a:xfrm>
+          <a:prstGeom prst="rect">
+            <a:avLst/>
+          </a:prstGeom>
+          <a:solidFill>
+            <a:schemeClr val="accent2">
+              <a:lumMod val="75000"/>
+            </a:schemeClr>
+          </a:solidFill>
+        </p:spPr>
+        <p:style>
+          <a:lnRef idx="2">
+            <a:schemeClr val="accent1">
+              <a:shade val="15000"/>
+            </a:schemeClr>
+          </a:lnRef>
+          <a:fillRef idx="1">
+            <a:schemeClr val="accent1"/>
+          </a:fillRef>
+          <a:effectRef idx="0">
+            <a:schemeClr val="accent1"/>
+          </a:effectRef>
+          <a:fontRef idx="minor">
+            <a:schemeClr val="lt1"/>
+          </a:fontRef>
+        </p:style>
+        <p:txBody>
+          <a:bodyPr rtlCol="0" anchor="ctr"/>
+          <a:lstStyle/>
+          <a:p>
+            <a:pPr algn="ctr"/>
+            <a:endParaRPr lang="en-US"/>
+          </a:p>
+        </p:txBody>
+      </p:sp>
+      <p:sp>
+        <p:nvSpPr>
+          <p:cNvPr id="29" name="Rectangle 28">
+            <a:extLst>
+              <a:ext uri="{FF2B5EF4-FFF2-40B4-BE49-F238E27FC236}">
+                <a16:creationId xmlns:a16="http://schemas.microsoft.com/office/drawing/2014/main" id="{FB7A95BB-8692-949A-24A4-0596BDBE5830}"/>
+              </a:ext>
+            </a:extLst>
+          </p:cNvPr>
+          <p:cNvSpPr/>
+          <p:nvPr/>
+        </p:nvSpPr>
+        <p:spPr>
+          <a:xfrm>
+            <a:off x="6316649" y="3311816"/>
+            <a:ext cx="530352" cy="1137874"/>
+          </a:xfrm>
+          <a:prstGeom prst="rect">
+            <a:avLst/>
+          </a:prstGeom>
+          <a:solidFill>
+            <a:schemeClr val="accent2">
+              <a:lumMod val="75000"/>
+            </a:schemeClr>
+          </a:solidFill>
+        </p:spPr>
+        <p:style>
+          <a:lnRef idx="2">
+            <a:schemeClr val="accent1">
+              <a:shade val="15000"/>
+            </a:schemeClr>
+          </a:lnRef>
+          <a:fillRef idx="1">
+            <a:schemeClr val="accent1"/>
+          </a:fillRef>
+          <a:effectRef idx="0">
+            <a:schemeClr val="accent1"/>
+          </a:effectRef>
+          <a:fontRef idx="minor">
+            <a:schemeClr val="lt1"/>
+          </a:fontRef>
+        </p:style>
+        <p:txBody>
+          <a:bodyPr rtlCol="0" anchor="ctr"/>
+          <a:lstStyle/>
+          <a:p>
+            <a:pPr algn="ctr"/>
+            <a:endParaRPr lang="en-US"/>
+          </a:p>
+        </p:txBody>
+      </p:sp>
+      <p:sp>
+        <p:nvSpPr>
+          <p:cNvPr id="30" name="Rectangle 29">
+            <a:extLst>
+              <a:ext uri="{FF2B5EF4-FFF2-40B4-BE49-F238E27FC236}">
+                <a16:creationId xmlns:a16="http://schemas.microsoft.com/office/drawing/2014/main" id="{947C38E3-C277-38A2-36EE-AC855D54FAA2}"/>
+              </a:ext>
+            </a:extLst>
+          </p:cNvPr>
+          <p:cNvSpPr/>
+          <p:nvPr/>
+        </p:nvSpPr>
+        <p:spPr>
+          <a:xfrm>
+            <a:off x="4295339" y="4901764"/>
+            <a:ext cx="530352" cy="554736"/>
+          </a:xfrm>
+          <a:prstGeom prst="rect">
+            <a:avLst/>
+          </a:prstGeom>
+          <a:solidFill>
+            <a:srgbClr val="92D050"/>
+          </a:solidFill>
+        </p:spPr>
+        <p:style>
+          <a:lnRef idx="2">
+            <a:schemeClr val="accent1">
+              <a:shade val="15000"/>
+            </a:schemeClr>
+          </a:lnRef>
+          <a:fillRef idx="1">
+            <a:schemeClr val="accent1"/>
+          </a:fillRef>
+          <a:effectRef idx="0">
+            <a:schemeClr val="accent1"/>
+          </a:effectRef>
+          <a:fontRef idx="minor">
+            <a:schemeClr val="lt1"/>
+          </a:fontRef>
+        </p:style>
+        <p:txBody>
+          <a:bodyPr rtlCol="0" anchor="ctr"/>
+          <a:lstStyle/>
+          <a:p>
+            <a:pPr algn="ctr"/>
+            <a:endParaRPr lang="en-US"/>
+          </a:p>
+        </p:txBody>
+      </p:sp>
+      <p:sp>
+        <p:nvSpPr>
+          <p:cNvPr id="31" name="Rectangle 30">
+            <a:extLst>
+              <a:ext uri="{FF2B5EF4-FFF2-40B4-BE49-F238E27FC236}">
+                <a16:creationId xmlns:a16="http://schemas.microsoft.com/office/drawing/2014/main" id="{B966F93E-9C44-F588-E96E-851B81F90163}"/>
+              </a:ext>
+            </a:extLst>
+          </p:cNvPr>
+          <p:cNvSpPr/>
+          <p:nvPr/>
+        </p:nvSpPr>
+        <p:spPr>
+          <a:xfrm>
+            <a:off x="5352994" y="4901764"/>
+            <a:ext cx="530352" cy="554736"/>
+          </a:xfrm>
+          <a:prstGeom prst="rect">
+            <a:avLst/>
+          </a:prstGeom>
+          <a:solidFill>
+            <a:srgbClr val="92D050"/>
+          </a:solidFill>
+        </p:spPr>
+        <p:style>
+          <a:lnRef idx="2">
+            <a:schemeClr val="accent1">
+              <a:shade val="15000"/>
+            </a:schemeClr>
+          </a:lnRef>
+          <a:fillRef idx="1">
+            <a:schemeClr val="accent1"/>
+          </a:fillRef>
+          <a:effectRef idx="0">
+            <a:schemeClr val="accent1"/>
+          </a:effectRef>
+          <a:fontRef idx="minor">
+            <a:schemeClr val="lt1"/>
+          </a:fontRef>
+        </p:style>
+        <p:txBody>
+          <a:bodyPr rtlCol="0" anchor="ctr"/>
+          <a:lstStyle/>
+          <a:p>
+            <a:pPr algn="ctr"/>
+            <a:endParaRPr lang="en-US"/>
+          </a:p>
+        </p:txBody>
+      </p:sp>
+      <p:sp>
+        <p:nvSpPr>
+          <p:cNvPr id="32" name="Rectangle 31">
+            <a:extLst>
+              <a:ext uri="{FF2B5EF4-FFF2-40B4-BE49-F238E27FC236}">
+                <a16:creationId xmlns:a16="http://schemas.microsoft.com/office/drawing/2014/main" id="{C80352DE-BEBF-D96D-0BB1-37C9AA3E35DA}"/>
+              </a:ext>
+            </a:extLst>
+          </p:cNvPr>
+          <p:cNvSpPr/>
+          <p:nvPr/>
+        </p:nvSpPr>
+        <p:spPr>
+          <a:xfrm>
+            <a:off x="6316649" y="4901764"/>
+            <a:ext cx="530352" cy="554736"/>
+          </a:xfrm>
+          <a:prstGeom prst="rect">
+            <a:avLst/>
+          </a:prstGeom>
+          <a:solidFill>
+            <a:srgbClr val="92D050"/>
+          </a:solidFill>
+        </p:spPr>
+        <p:style>
+          <a:lnRef idx="2">
+            <a:schemeClr val="accent1">
+              <a:shade val="15000"/>
+            </a:schemeClr>
+          </a:lnRef>
+          <a:fillRef idx="1">
+            <a:schemeClr val="accent1"/>
+          </a:fillRef>
+          <a:effectRef idx="0">
+            <a:schemeClr val="accent1"/>
+          </a:effectRef>
+          <a:fontRef idx="minor">
+            <a:schemeClr val="lt1"/>
+          </a:fontRef>
+        </p:style>
+        <p:txBody>
+          <a:bodyPr rtlCol="0" anchor="ctr"/>
+          <a:lstStyle/>
+          <a:p>
+            <a:pPr algn="ctr"/>
+            <a:endParaRPr lang="en-US"/>
+          </a:p>
+        </p:txBody>
+      </p:sp>
+      <p:sp>
+        <p:nvSpPr>
+          <p:cNvPr id="35" name="Arrow: Right 34">
+            <a:extLst>
+              <a:ext uri="{FF2B5EF4-FFF2-40B4-BE49-F238E27FC236}">
+                <a16:creationId xmlns:a16="http://schemas.microsoft.com/office/drawing/2014/main" id="{96BE83BD-62C1-55F0-4B57-516EFFBA1CDB}"/>
+              </a:ext>
+            </a:extLst>
+          </p:cNvPr>
+          <p:cNvSpPr/>
+          <p:nvPr/>
+        </p:nvSpPr>
+        <p:spPr>
+          <a:xfrm rot="16200000">
+            <a:off x="6413186" y="2831893"/>
+            <a:ext cx="405966" cy="461665"/>
+          </a:xfrm>
+          <a:prstGeom prst="rightArrow">
+            <a:avLst/>
+          </a:prstGeom>
+        </p:spPr>
+        <p:style>
+          <a:lnRef idx="2">
+            <a:schemeClr val="accent1">
+              <a:shade val="15000"/>
+            </a:schemeClr>
+          </a:lnRef>
+          <a:fillRef idx="1">
+            <a:schemeClr val="accent1"/>
+          </a:fillRef>
+          <a:effectRef idx="0">
+            <a:schemeClr val="accent1"/>
+          </a:effectRef>
+          <a:fontRef idx="minor">
+            <a:schemeClr val="lt1"/>
+          </a:fontRef>
+        </p:style>
+        <p:txBody>
+          <a:bodyPr rtlCol="0" anchor="ctr"/>
+          <a:lstStyle/>
+          <a:p>
+            <a:pPr algn="ctr"/>
+            <a:endParaRPr lang="en-US"/>
+          </a:p>
+        </p:txBody>
+      </p:sp>
+      <p:sp>
+        <p:nvSpPr>
+          <p:cNvPr id="36" name="Arrow: Right 35">
+            <a:extLst>
+              <a:ext uri="{FF2B5EF4-FFF2-40B4-BE49-F238E27FC236}">
+                <a16:creationId xmlns:a16="http://schemas.microsoft.com/office/drawing/2014/main" id="{D4C91A89-F3C0-DE29-E3E6-3E8FDBBDCC9A}"/>
+              </a:ext>
+            </a:extLst>
+          </p:cNvPr>
+          <p:cNvSpPr/>
+          <p:nvPr/>
+        </p:nvSpPr>
+        <p:spPr>
+          <a:xfrm rot="16200000">
+            <a:off x="4366783" y="4432922"/>
+            <a:ext cx="405966" cy="461665"/>
+          </a:xfrm>
+          <a:prstGeom prst="rightArrow">
+            <a:avLst/>
+          </a:prstGeom>
+        </p:spPr>
+        <p:style>
+          <a:lnRef idx="2">
+            <a:schemeClr val="accent1">
+              <a:shade val="15000"/>
+            </a:schemeClr>
+          </a:lnRef>
+          <a:fillRef idx="1">
+            <a:schemeClr val="accent1"/>
+          </a:fillRef>
+          <a:effectRef idx="0">
+            <a:schemeClr val="accent1"/>
+          </a:effectRef>
+          <a:fontRef idx="minor">
+            <a:schemeClr val="lt1"/>
+          </a:fontRef>
+        </p:style>
+        <p:txBody>
+          <a:bodyPr rtlCol="0" anchor="ctr"/>
+          <a:lstStyle/>
+          <a:p>
+            <a:pPr algn="ctr"/>
+            <a:endParaRPr lang="en-US"/>
+          </a:p>
+        </p:txBody>
+      </p:sp>
+      <p:sp>
+        <p:nvSpPr>
+          <p:cNvPr id="37" name="Arrow: Right 36">
+            <a:extLst>
+              <a:ext uri="{FF2B5EF4-FFF2-40B4-BE49-F238E27FC236}">
+                <a16:creationId xmlns:a16="http://schemas.microsoft.com/office/drawing/2014/main" id="{1EB290F6-6CDE-B558-55DC-D6552EA6F235}"/>
+              </a:ext>
+            </a:extLst>
+          </p:cNvPr>
+          <p:cNvSpPr/>
+          <p:nvPr/>
+        </p:nvSpPr>
+        <p:spPr>
+          <a:xfrm rot="16200000">
+            <a:off x="5415186" y="4421840"/>
+            <a:ext cx="405966" cy="461665"/>
+          </a:xfrm>
+          <a:prstGeom prst="rightArrow">
+            <a:avLst/>
+          </a:prstGeom>
+        </p:spPr>
+        <p:style>
+          <a:lnRef idx="2">
+            <a:schemeClr val="accent1">
+              <a:shade val="15000"/>
+            </a:schemeClr>
+          </a:lnRef>
+          <a:fillRef idx="1">
+            <a:schemeClr val="accent1"/>
+          </a:fillRef>
+          <a:effectRef idx="0">
+            <a:schemeClr val="accent1"/>
+          </a:effectRef>
+          <a:fontRef idx="minor">
+            <a:schemeClr val="lt1"/>
+          </a:fontRef>
+        </p:style>
+        <p:txBody>
+          <a:bodyPr rtlCol="0" anchor="ctr"/>
+          <a:lstStyle/>
+          <a:p>
+            <a:pPr algn="ctr"/>
+            <a:endParaRPr lang="en-US"/>
+          </a:p>
+        </p:txBody>
+      </p:sp>
+      <p:sp>
+        <p:nvSpPr>
+          <p:cNvPr id="38" name="Arrow: Right 37">
+            <a:extLst>
+              <a:ext uri="{FF2B5EF4-FFF2-40B4-BE49-F238E27FC236}">
+                <a16:creationId xmlns:a16="http://schemas.microsoft.com/office/drawing/2014/main" id="{B6120CEE-9E96-B8E2-FA4A-0C774F3D18F8}"/>
+              </a:ext>
+            </a:extLst>
+          </p:cNvPr>
+          <p:cNvSpPr/>
+          <p:nvPr/>
+        </p:nvSpPr>
+        <p:spPr>
+          <a:xfrm rot="16200000">
+            <a:off x="6413185" y="4421840"/>
+            <a:ext cx="405966" cy="461665"/>
+          </a:xfrm>
+          <a:prstGeom prst="rightArrow">
+            <a:avLst/>
+          </a:prstGeom>
+        </p:spPr>
+        <p:style>
+          <a:lnRef idx="2">
+            <a:schemeClr val="accent1">
+              <a:shade val="15000"/>
+            </a:schemeClr>
+          </a:lnRef>
+          <a:fillRef idx="1">
+            <a:schemeClr val="accent1"/>
+          </a:fillRef>
+          <a:effectRef idx="0">
+            <a:schemeClr val="accent1"/>
+          </a:effectRef>
+          <a:fontRef idx="minor">
+            <a:schemeClr val="lt1"/>
+          </a:fontRef>
+        </p:style>
+        <p:txBody>
+          <a:bodyPr rtlCol="0" anchor="ctr"/>
+          <a:lstStyle/>
+          <a:p>
+            <a:pPr algn="ctr"/>
+            <a:endParaRPr lang="en-US"/>
+          </a:p>
+        </p:txBody>
+      </p:sp>
+      <p:sp>
+        <p:nvSpPr>
+          <p:cNvPr id="39" name="Arrow: Right 38">
+            <a:extLst>
+              <a:ext uri="{FF2B5EF4-FFF2-40B4-BE49-F238E27FC236}">
+                <a16:creationId xmlns:a16="http://schemas.microsoft.com/office/drawing/2014/main" id="{0D4F3B54-D504-CA25-1F29-8626BB619057}"/>
+              </a:ext>
+            </a:extLst>
+          </p:cNvPr>
+          <p:cNvSpPr/>
+          <p:nvPr/>
+        </p:nvSpPr>
+        <p:spPr>
+          <a:xfrm>
+            <a:off x="4907403" y="3735058"/>
+            <a:ext cx="393192" cy="291389"/>
+          </a:xfrm>
+          <a:prstGeom prst="rightArrow">
+            <a:avLst/>
+          </a:prstGeom>
+        </p:spPr>
+        <p:style>
+          <a:lnRef idx="2">
+            <a:schemeClr val="accent1">
+              <a:shade val="15000"/>
+            </a:schemeClr>
+          </a:lnRef>
+          <a:fillRef idx="1">
+            <a:schemeClr val="accent1"/>
+          </a:fillRef>
+          <a:effectRef idx="0">
+            <a:schemeClr val="accent1"/>
+          </a:effectRef>
+          <a:fontRef idx="minor">
+            <a:schemeClr val="lt1"/>
+          </a:fontRef>
+        </p:style>
+        <p:txBody>
+          <a:bodyPr rtlCol="0" anchor="ctr"/>
+          <a:lstStyle/>
+          <a:p>
+            <a:pPr algn="ctr"/>
+            <a:endParaRPr lang="en-US"/>
+          </a:p>
+        </p:txBody>
+      </p:sp>
+      <p:sp>
+        <p:nvSpPr>
+          <p:cNvPr id="40" name="Arrow: Right 39">
+            <a:extLst>
+              <a:ext uri="{FF2B5EF4-FFF2-40B4-BE49-F238E27FC236}">
+                <a16:creationId xmlns:a16="http://schemas.microsoft.com/office/drawing/2014/main" id="{C19D7E06-C2D0-B75C-04B5-B816134142C9}"/>
+              </a:ext>
+            </a:extLst>
+          </p:cNvPr>
+          <p:cNvSpPr/>
+          <p:nvPr/>
+        </p:nvSpPr>
+        <p:spPr>
+          <a:xfrm>
+            <a:off x="5923457" y="3749871"/>
+            <a:ext cx="393192" cy="291389"/>
+          </a:xfrm>
+          <a:prstGeom prst="rightArrow">
+            <a:avLst/>
+          </a:prstGeom>
+        </p:spPr>
+        <p:style>
+          <a:lnRef idx="2">
+            <a:schemeClr val="accent1">
+              <a:shade val="15000"/>
+            </a:schemeClr>
+          </a:lnRef>
+          <a:fillRef idx="1">
+            <a:schemeClr val="accent1"/>
+          </a:fillRef>
+          <a:effectRef idx="0">
+            <a:schemeClr val="accent1"/>
+          </a:effectRef>
+          <a:fontRef idx="minor">
+            <a:schemeClr val="lt1"/>
+          </a:fontRef>
+        </p:style>
+        <p:txBody>
+          <a:bodyPr rtlCol="0" anchor="ctr"/>
+          <a:lstStyle/>
+          <a:p>
+            <a:pPr algn="ctr"/>
+            <a:endParaRPr lang="en-US"/>
+          </a:p>
+        </p:txBody>
+      </p:sp>
+      <p:sp>
+        <p:nvSpPr>
+          <p:cNvPr id="41" name="TextBox 40">
+            <a:extLst>
+              <a:ext uri="{FF2B5EF4-FFF2-40B4-BE49-F238E27FC236}">
+                <a16:creationId xmlns:a16="http://schemas.microsoft.com/office/drawing/2014/main" id="{8C49C477-D60D-A787-9360-1C8D88A4D70A}"/>
+              </a:ext>
+            </a:extLst>
+          </p:cNvPr>
+          <p:cNvSpPr txBox="1"/>
+          <p:nvPr/>
+        </p:nvSpPr>
+        <p:spPr>
+          <a:xfrm>
+            <a:off x="4792129" y="1901387"/>
+            <a:ext cx="1767728" cy="461665"/>
+          </a:xfrm>
+          <a:prstGeom prst="rect">
+            <a:avLst/>
+          </a:prstGeom>
+          <a:noFill/>
+        </p:spPr>
+        <p:txBody>
+          <a:bodyPr wrap="none" rtlCol="0">
+            <a:spAutoFit/>
+          </a:bodyPr>
+          <a:lstStyle/>
           <a:p>
             <a:r>
               <a:rPr lang="en-US" sz="2400" dirty="0">
@@ -6286,19 +7742,663 @@
                   </a:schemeClr>
                 </a:solidFill>
               </a:rPr>
-              <a:t>Places near me to ___                      -&gt; eat</a:t>
-            </a:r>
-          </a:p>
-          <a:p>
-            <a:endParaRPr lang="en-US" sz="2400" dirty="0">
-              <a:solidFill>
-                <a:schemeClr val="accent6">
-                  <a:lumMod val="60000"/>
-                  <a:lumOff val="40000"/>
-                </a:schemeClr>
-              </a:solidFill>
-            </a:endParaRPr>
-          </a:p>
+              <a:t>Many to one</a:t>
+            </a:r>
+          </a:p>
+        </p:txBody>
+      </p:sp>
+      <p:sp>
+        <p:nvSpPr>
+          <p:cNvPr id="42" name="Rectangle 41">
+            <a:extLst>
+              <a:ext uri="{FF2B5EF4-FFF2-40B4-BE49-F238E27FC236}">
+                <a16:creationId xmlns:a16="http://schemas.microsoft.com/office/drawing/2014/main" id="{0D752DF2-3566-72E8-37CA-760AE4A0DDC4}"/>
+              </a:ext>
+            </a:extLst>
+          </p:cNvPr>
+          <p:cNvSpPr/>
+          <p:nvPr/>
+        </p:nvSpPr>
+        <p:spPr>
+          <a:xfrm>
+            <a:off x="8722228" y="2526344"/>
+            <a:ext cx="530352" cy="461665"/>
+          </a:xfrm>
+          <a:prstGeom prst="rect">
+            <a:avLst/>
+          </a:prstGeom>
+          <a:solidFill>
+            <a:schemeClr val="accent4"/>
+          </a:solidFill>
+        </p:spPr>
+        <p:style>
+          <a:lnRef idx="2">
+            <a:schemeClr val="accent1">
+              <a:shade val="15000"/>
+            </a:schemeClr>
+          </a:lnRef>
+          <a:fillRef idx="1">
+            <a:schemeClr val="accent1"/>
+          </a:fillRef>
+          <a:effectRef idx="0">
+            <a:schemeClr val="accent1"/>
+          </a:effectRef>
+          <a:fontRef idx="minor">
+            <a:schemeClr val="lt1"/>
+          </a:fontRef>
+        </p:style>
+        <p:txBody>
+          <a:bodyPr rtlCol="0" anchor="ctr"/>
+          <a:lstStyle/>
+          <a:p>
+            <a:pPr algn="ctr"/>
+            <a:endParaRPr lang="en-US"/>
+          </a:p>
+        </p:txBody>
+      </p:sp>
+      <p:sp>
+        <p:nvSpPr>
+          <p:cNvPr id="43" name="Rectangle 42">
+            <a:extLst>
+              <a:ext uri="{FF2B5EF4-FFF2-40B4-BE49-F238E27FC236}">
+                <a16:creationId xmlns:a16="http://schemas.microsoft.com/office/drawing/2014/main" id="{033CC237-B0A6-38DC-DDB9-AFBCAF5C6323}"/>
+              </a:ext>
+            </a:extLst>
+          </p:cNvPr>
+          <p:cNvSpPr/>
+          <p:nvPr/>
+        </p:nvSpPr>
+        <p:spPr>
+          <a:xfrm>
+            <a:off x="9779883" y="2526344"/>
+            <a:ext cx="530352" cy="461665"/>
+          </a:xfrm>
+          <a:prstGeom prst="rect">
+            <a:avLst/>
+          </a:prstGeom>
+          <a:solidFill>
+            <a:schemeClr val="accent4"/>
+          </a:solidFill>
+        </p:spPr>
+        <p:style>
+          <a:lnRef idx="2">
+            <a:schemeClr val="accent1">
+              <a:shade val="15000"/>
+            </a:schemeClr>
+          </a:lnRef>
+          <a:fillRef idx="1">
+            <a:schemeClr val="accent1"/>
+          </a:fillRef>
+          <a:effectRef idx="0">
+            <a:schemeClr val="accent1"/>
+          </a:effectRef>
+          <a:fontRef idx="minor">
+            <a:schemeClr val="lt1"/>
+          </a:fontRef>
+        </p:style>
+        <p:txBody>
+          <a:bodyPr rtlCol="0" anchor="ctr"/>
+          <a:lstStyle/>
+          <a:p>
+            <a:pPr algn="ctr"/>
+            <a:endParaRPr lang="en-US"/>
+          </a:p>
+        </p:txBody>
+      </p:sp>
+      <p:sp>
+        <p:nvSpPr>
+          <p:cNvPr id="44" name="Rectangle 43">
+            <a:extLst>
+              <a:ext uri="{FF2B5EF4-FFF2-40B4-BE49-F238E27FC236}">
+                <a16:creationId xmlns:a16="http://schemas.microsoft.com/office/drawing/2014/main" id="{550E00F5-0BD2-0A1E-BC4F-D171F8A0C028}"/>
+              </a:ext>
+            </a:extLst>
+          </p:cNvPr>
+          <p:cNvSpPr/>
+          <p:nvPr/>
+        </p:nvSpPr>
+        <p:spPr>
+          <a:xfrm>
+            <a:off x="10743538" y="2526344"/>
+            <a:ext cx="530352" cy="461665"/>
+          </a:xfrm>
+          <a:prstGeom prst="rect">
+            <a:avLst/>
+          </a:prstGeom>
+          <a:solidFill>
+            <a:schemeClr val="accent4"/>
+          </a:solidFill>
+        </p:spPr>
+        <p:style>
+          <a:lnRef idx="2">
+            <a:schemeClr val="accent1">
+              <a:shade val="15000"/>
+            </a:schemeClr>
+          </a:lnRef>
+          <a:fillRef idx="1">
+            <a:schemeClr val="accent1"/>
+          </a:fillRef>
+          <a:effectRef idx="0">
+            <a:schemeClr val="accent1"/>
+          </a:effectRef>
+          <a:fontRef idx="minor">
+            <a:schemeClr val="lt1"/>
+          </a:fontRef>
+        </p:style>
+        <p:txBody>
+          <a:bodyPr rtlCol="0" anchor="ctr"/>
+          <a:lstStyle/>
+          <a:p>
+            <a:pPr algn="ctr"/>
+            <a:endParaRPr lang="en-US"/>
+          </a:p>
+        </p:txBody>
+      </p:sp>
+      <p:sp>
+        <p:nvSpPr>
+          <p:cNvPr id="45" name="Rectangle 44">
+            <a:extLst>
+              <a:ext uri="{FF2B5EF4-FFF2-40B4-BE49-F238E27FC236}">
+                <a16:creationId xmlns:a16="http://schemas.microsoft.com/office/drawing/2014/main" id="{64BFC0BB-CA69-78A4-A722-617A1A2EE0E4}"/>
+              </a:ext>
+            </a:extLst>
+          </p:cNvPr>
+          <p:cNvSpPr/>
+          <p:nvPr/>
+        </p:nvSpPr>
+        <p:spPr>
+          <a:xfrm>
+            <a:off x="8722228" y="3429000"/>
+            <a:ext cx="530352" cy="1137874"/>
+          </a:xfrm>
+          <a:prstGeom prst="rect">
+            <a:avLst/>
+          </a:prstGeom>
+          <a:solidFill>
+            <a:schemeClr val="accent2">
+              <a:lumMod val="75000"/>
+            </a:schemeClr>
+          </a:solidFill>
+        </p:spPr>
+        <p:style>
+          <a:lnRef idx="2">
+            <a:schemeClr val="accent1">
+              <a:shade val="15000"/>
+            </a:schemeClr>
+          </a:lnRef>
+          <a:fillRef idx="1">
+            <a:schemeClr val="accent1"/>
+          </a:fillRef>
+          <a:effectRef idx="0">
+            <a:schemeClr val="accent1"/>
+          </a:effectRef>
+          <a:fontRef idx="minor">
+            <a:schemeClr val="lt1"/>
+          </a:fontRef>
+        </p:style>
+        <p:txBody>
+          <a:bodyPr rtlCol="0" anchor="ctr"/>
+          <a:lstStyle/>
+          <a:p>
+            <a:pPr algn="ctr"/>
+            <a:endParaRPr lang="en-US"/>
+          </a:p>
+        </p:txBody>
+      </p:sp>
+      <p:sp>
+        <p:nvSpPr>
+          <p:cNvPr id="46" name="Rectangle 45">
+            <a:extLst>
+              <a:ext uri="{FF2B5EF4-FFF2-40B4-BE49-F238E27FC236}">
+                <a16:creationId xmlns:a16="http://schemas.microsoft.com/office/drawing/2014/main" id="{97714864-04B1-3602-2932-4EED7D82B0AC}"/>
+              </a:ext>
+            </a:extLst>
+          </p:cNvPr>
+          <p:cNvSpPr/>
+          <p:nvPr/>
+        </p:nvSpPr>
+        <p:spPr>
+          <a:xfrm>
+            <a:off x="9779883" y="3429000"/>
+            <a:ext cx="530352" cy="1137874"/>
+          </a:xfrm>
+          <a:prstGeom prst="rect">
+            <a:avLst/>
+          </a:prstGeom>
+          <a:solidFill>
+            <a:schemeClr val="accent2">
+              <a:lumMod val="75000"/>
+            </a:schemeClr>
+          </a:solidFill>
+        </p:spPr>
+        <p:style>
+          <a:lnRef idx="2">
+            <a:schemeClr val="accent1">
+              <a:shade val="15000"/>
+            </a:schemeClr>
+          </a:lnRef>
+          <a:fillRef idx="1">
+            <a:schemeClr val="accent1"/>
+          </a:fillRef>
+          <a:effectRef idx="0">
+            <a:schemeClr val="accent1"/>
+          </a:effectRef>
+          <a:fontRef idx="minor">
+            <a:schemeClr val="lt1"/>
+          </a:fontRef>
+        </p:style>
+        <p:txBody>
+          <a:bodyPr rtlCol="0" anchor="ctr"/>
+          <a:lstStyle/>
+          <a:p>
+            <a:pPr algn="ctr"/>
+            <a:endParaRPr lang="en-US"/>
+          </a:p>
+        </p:txBody>
+      </p:sp>
+      <p:sp>
+        <p:nvSpPr>
+          <p:cNvPr id="47" name="Rectangle 46">
+            <a:extLst>
+              <a:ext uri="{FF2B5EF4-FFF2-40B4-BE49-F238E27FC236}">
+                <a16:creationId xmlns:a16="http://schemas.microsoft.com/office/drawing/2014/main" id="{79013BE2-5E55-9CED-0FD2-44E6E1DF3121}"/>
+              </a:ext>
+            </a:extLst>
+          </p:cNvPr>
+          <p:cNvSpPr/>
+          <p:nvPr/>
+        </p:nvSpPr>
+        <p:spPr>
+          <a:xfrm>
+            <a:off x="10743538" y="3429000"/>
+            <a:ext cx="530352" cy="1137874"/>
+          </a:xfrm>
+          <a:prstGeom prst="rect">
+            <a:avLst/>
+          </a:prstGeom>
+          <a:solidFill>
+            <a:schemeClr val="accent2">
+              <a:lumMod val="75000"/>
+            </a:schemeClr>
+          </a:solidFill>
+        </p:spPr>
+        <p:style>
+          <a:lnRef idx="2">
+            <a:schemeClr val="accent1">
+              <a:shade val="15000"/>
+            </a:schemeClr>
+          </a:lnRef>
+          <a:fillRef idx="1">
+            <a:schemeClr val="accent1"/>
+          </a:fillRef>
+          <a:effectRef idx="0">
+            <a:schemeClr val="accent1"/>
+          </a:effectRef>
+          <a:fontRef idx="minor">
+            <a:schemeClr val="lt1"/>
+          </a:fontRef>
+        </p:style>
+        <p:txBody>
+          <a:bodyPr rtlCol="0" anchor="ctr"/>
+          <a:lstStyle/>
+          <a:p>
+            <a:pPr algn="ctr"/>
+            <a:endParaRPr lang="en-US"/>
+          </a:p>
+        </p:txBody>
+      </p:sp>
+      <p:sp>
+        <p:nvSpPr>
+          <p:cNvPr id="48" name="Rectangle 47">
+            <a:extLst>
+              <a:ext uri="{FF2B5EF4-FFF2-40B4-BE49-F238E27FC236}">
+                <a16:creationId xmlns:a16="http://schemas.microsoft.com/office/drawing/2014/main" id="{0B4A26B4-E1EE-940F-60B7-6F2A8EEA61C0}"/>
+              </a:ext>
+            </a:extLst>
+          </p:cNvPr>
+          <p:cNvSpPr/>
+          <p:nvPr/>
+        </p:nvSpPr>
+        <p:spPr>
+          <a:xfrm>
+            <a:off x="8722228" y="5018948"/>
+            <a:ext cx="530352" cy="554736"/>
+          </a:xfrm>
+          <a:prstGeom prst="rect">
+            <a:avLst/>
+          </a:prstGeom>
+          <a:solidFill>
+            <a:srgbClr val="92D050"/>
+          </a:solidFill>
+        </p:spPr>
+        <p:style>
+          <a:lnRef idx="2">
+            <a:schemeClr val="accent1">
+              <a:shade val="15000"/>
+            </a:schemeClr>
+          </a:lnRef>
+          <a:fillRef idx="1">
+            <a:schemeClr val="accent1"/>
+          </a:fillRef>
+          <a:effectRef idx="0">
+            <a:schemeClr val="accent1"/>
+          </a:effectRef>
+          <a:fontRef idx="minor">
+            <a:schemeClr val="lt1"/>
+          </a:fontRef>
+        </p:style>
+        <p:txBody>
+          <a:bodyPr rtlCol="0" anchor="ctr"/>
+          <a:lstStyle/>
+          <a:p>
+            <a:pPr algn="ctr"/>
+            <a:endParaRPr lang="en-US"/>
+          </a:p>
+        </p:txBody>
+      </p:sp>
+      <p:sp>
+        <p:nvSpPr>
+          <p:cNvPr id="51" name="Arrow: Right 50">
+            <a:extLst>
+              <a:ext uri="{FF2B5EF4-FFF2-40B4-BE49-F238E27FC236}">
+                <a16:creationId xmlns:a16="http://schemas.microsoft.com/office/drawing/2014/main" id="{61AF5F56-3F8E-AC48-0569-12F283EB51F1}"/>
+              </a:ext>
+            </a:extLst>
+          </p:cNvPr>
+          <p:cNvSpPr/>
+          <p:nvPr/>
+        </p:nvSpPr>
+        <p:spPr>
+          <a:xfrm rot="16200000">
+            <a:off x="8793673" y="2960159"/>
+            <a:ext cx="405966" cy="461665"/>
+          </a:xfrm>
+          <a:prstGeom prst="rightArrow">
+            <a:avLst/>
+          </a:prstGeom>
+        </p:spPr>
+        <p:style>
+          <a:lnRef idx="2">
+            <a:schemeClr val="accent1">
+              <a:shade val="15000"/>
+            </a:schemeClr>
+          </a:lnRef>
+          <a:fillRef idx="1">
+            <a:schemeClr val="accent1"/>
+          </a:fillRef>
+          <a:effectRef idx="0">
+            <a:schemeClr val="accent1"/>
+          </a:effectRef>
+          <a:fontRef idx="minor">
+            <a:schemeClr val="lt1"/>
+          </a:fontRef>
+        </p:style>
+        <p:txBody>
+          <a:bodyPr rtlCol="0" anchor="ctr"/>
+          <a:lstStyle/>
+          <a:p>
+            <a:pPr algn="ctr"/>
+            <a:endParaRPr lang="en-US"/>
+          </a:p>
+        </p:txBody>
+      </p:sp>
+      <p:sp>
+        <p:nvSpPr>
+          <p:cNvPr id="52" name="Arrow: Right 51">
+            <a:extLst>
+              <a:ext uri="{FF2B5EF4-FFF2-40B4-BE49-F238E27FC236}">
+                <a16:creationId xmlns:a16="http://schemas.microsoft.com/office/drawing/2014/main" id="{D35AB366-1D02-5B5B-A703-802824D679F5}"/>
+              </a:ext>
+            </a:extLst>
+          </p:cNvPr>
+          <p:cNvSpPr/>
+          <p:nvPr/>
+        </p:nvSpPr>
+        <p:spPr>
+          <a:xfrm rot="16200000">
+            <a:off x="9842076" y="2949077"/>
+            <a:ext cx="405966" cy="461665"/>
+          </a:xfrm>
+          <a:prstGeom prst="rightArrow">
+            <a:avLst/>
+          </a:prstGeom>
+        </p:spPr>
+        <p:style>
+          <a:lnRef idx="2">
+            <a:schemeClr val="accent1">
+              <a:shade val="15000"/>
+            </a:schemeClr>
+          </a:lnRef>
+          <a:fillRef idx="1">
+            <a:schemeClr val="accent1"/>
+          </a:fillRef>
+          <a:effectRef idx="0">
+            <a:schemeClr val="accent1"/>
+          </a:effectRef>
+          <a:fontRef idx="minor">
+            <a:schemeClr val="lt1"/>
+          </a:fontRef>
+        </p:style>
+        <p:txBody>
+          <a:bodyPr rtlCol="0" anchor="ctr"/>
+          <a:lstStyle/>
+          <a:p>
+            <a:pPr algn="ctr"/>
+            <a:endParaRPr lang="en-US"/>
+          </a:p>
+        </p:txBody>
+      </p:sp>
+      <p:sp>
+        <p:nvSpPr>
+          <p:cNvPr id="53" name="Arrow: Right 52">
+            <a:extLst>
+              <a:ext uri="{FF2B5EF4-FFF2-40B4-BE49-F238E27FC236}">
+                <a16:creationId xmlns:a16="http://schemas.microsoft.com/office/drawing/2014/main" id="{21D0AA96-20C9-9CAD-B1A3-938D32C6EFC7}"/>
+              </a:ext>
+            </a:extLst>
+          </p:cNvPr>
+          <p:cNvSpPr/>
+          <p:nvPr/>
+        </p:nvSpPr>
+        <p:spPr>
+          <a:xfrm rot="16200000">
+            <a:off x="10840075" y="2949077"/>
+            <a:ext cx="405966" cy="461665"/>
+          </a:xfrm>
+          <a:prstGeom prst="rightArrow">
+            <a:avLst/>
+          </a:prstGeom>
+        </p:spPr>
+        <p:style>
+          <a:lnRef idx="2">
+            <a:schemeClr val="accent1">
+              <a:shade val="15000"/>
+            </a:schemeClr>
+          </a:lnRef>
+          <a:fillRef idx="1">
+            <a:schemeClr val="accent1"/>
+          </a:fillRef>
+          <a:effectRef idx="0">
+            <a:schemeClr val="accent1"/>
+          </a:effectRef>
+          <a:fontRef idx="minor">
+            <a:schemeClr val="lt1"/>
+          </a:fontRef>
+        </p:style>
+        <p:txBody>
+          <a:bodyPr rtlCol="0" anchor="ctr"/>
+          <a:lstStyle/>
+          <a:p>
+            <a:pPr algn="ctr"/>
+            <a:endParaRPr lang="en-US"/>
+          </a:p>
+        </p:txBody>
+      </p:sp>
+      <p:sp>
+        <p:nvSpPr>
+          <p:cNvPr id="54" name="Arrow: Right 53">
+            <a:extLst>
+              <a:ext uri="{FF2B5EF4-FFF2-40B4-BE49-F238E27FC236}">
+                <a16:creationId xmlns:a16="http://schemas.microsoft.com/office/drawing/2014/main" id="{3633591D-31F1-0B2B-99F4-EE527936043E}"/>
+              </a:ext>
+            </a:extLst>
+          </p:cNvPr>
+          <p:cNvSpPr/>
+          <p:nvPr/>
+        </p:nvSpPr>
+        <p:spPr>
+          <a:xfrm rot="16200000">
+            <a:off x="8793672" y="4550106"/>
+            <a:ext cx="405966" cy="461665"/>
+          </a:xfrm>
+          <a:prstGeom prst="rightArrow">
+            <a:avLst/>
+          </a:prstGeom>
+        </p:spPr>
+        <p:style>
+          <a:lnRef idx="2">
+            <a:schemeClr val="accent1">
+              <a:shade val="15000"/>
+            </a:schemeClr>
+          </a:lnRef>
+          <a:fillRef idx="1">
+            <a:schemeClr val="accent1"/>
+          </a:fillRef>
+          <a:effectRef idx="0">
+            <a:schemeClr val="accent1"/>
+          </a:effectRef>
+          <a:fontRef idx="minor">
+            <a:schemeClr val="lt1"/>
+          </a:fontRef>
+        </p:style>
+        <p:txBody>
+          <a:bodyPr rtlCol="0" anchor="ctr"/>
+          <a:lstStyle/>
+          <a:p>
+            <a:pPr algn="ctr"/>
+            <a:endParaRPr lang="en-US"/>
+          </a:p>
+        </p:txBody>
+      </p:sp>
+      <p:sp>
+        <p:nvSpPr>
+          <p:cNvPr id="57" name="Arrow: Right 56">
+            <a:extLst>
+              <a:ext uri="{FF2B5EF4-FFF2-40B4-BE49-F238E27FC236}">
+                <a16:creationId xmlns:a16="http://schemas.microsoft.com/office/drawing/2014/main" id="{5B270F5C-3D8F-D541-F708-2F3B78EBDC28}"/>
+              </a:ext>
+            </a:extLst>
+          </p:cNvPr>
+          <p:cNvSpPr/>
+          <p:nvPr/>
+        </p:nvSpPr>
+        <p:spPr>
+          <a:xfrm>
+            <a:off x="9334292" y="3852242"/>
+            <a:ext cx="393192" cy="291389"/>
+          </a:xfrm>
+          <a:prstGeom prst="rightArrow">
+            <a:avLst/>
+          </a:prstGeom>
+        </p:spPr>
+        <p:style>
+          <a:lnRef idx="2">
+            <a:schemeClr val="accent1">
+              <a:shade val="15000"/>
+            </a:schemeClr>
+          </a:lnRef>
+          <a:fillRef idx="1">
+            <a:schemeClr val="accent1"/>
+          </a:fillRef>
+          <a:effectRef idx="0">
+            <a:schemeClr val="accent1"/>
+          </a:effectRef>
+          <a:fontRef idx="minor">
+            <a:schemeClr val="lt1"/>
+          </a:fontRef>
+        </p:style>
+        <p:txBody>
+          <a:bodyPr rtlCol="0" anchor="ctr"/>
+          <a:lstStyle/>
+          <a:p>
+            <a:pPr algn="ctr"/>
+            <a:endParaRPr lang="en-US"/>
+          </a:p>
+        </p:txBody>
+      </p:sp>
+      <p:sp>
+        <p:nvSpPr>
+          <p:cNvPr id="58" name="Arrow: Right 57">
+            <a:extLst>
+              <a:ext uri="{FF2B5EF4-FFF2-40B4-BE49-F238E27FC236}">
+                <a16:creationId xmlns:a16="http://schemas.microsoft.com/office/drawing/2014/main" id="{0C5DF5CF-44DB-6037-607E-1FBF305757C4}"/>
+              </a:ext>
+            </a:extLst>
+          </p:cNvPr>
+          <p:cNvSpPr/>
+          <p:nvPr/>
+        </p:nvSpPr>
+        <p:spPr>
+          <a:xfrm>
+            <a:off x="10350346" y="3867055"/>
+            <a:ext cx="393192" cy="291389"/>
+          </a:xfrm>
+          <a:prstGeom prst="rightArrow">
+            <a:avLst/>
+          </a:prstGeom>
+        </p:spPr>
+        <p:style>
+          <a:lnRef idx="2">
+            <a:schemeClr val="accent1">
+              <a:shade val="15000"/>
+            </a:schemeClr>
+          </a:lnRef>
+          <a:fillRef idx="1">
+            <a:schemeClr val="accent1"/>
+          </a:fillRef>
+          <a:effectRef idx="0">
+            <a:schemeClr val="accent1"/>
+          </a:effectRef>
+          <a:fontRef idx="minor">
+            <a:schemeClr val="lt1"/>
+          </a:fontRef>
+        </p:style>
+        <p:txBody>
+          <a:bodyPr rtlCol="0" anchor="ctr"/>
+          <a:lstStyle/>
+          <a:p>
+            <a:pPr algn="ctr"/>
+            <a:endParaRPr lang="en-US"/>
+          </a:p>
+        </p:txBody>
+      </p:sp>
+      <p:sp>
+        <p:nvSpPr>
+          <p:cNvPr id="59" name="TextBox 58">
+            <a:extLst>
+              <a:ext uri="{FF2B5EF4-FFF2-40B4-BE49-F238E27FC236}">
+                <a16:creationId xmlns:a16="http://schemas.microsoft.com/office/drawing/2014/main" id="{7708F9D1-3B68-3C43-A986-B2C599C5E07B}"/>
+              </a:ext>
+            </a:extLst>
+          </p:cNvPr>
+          <p:cNvSpPr txBox="1"/>
+          <p:nvPr/>
+        </p:nvSpPr>
+        <p:spPr>
+          <a:xfrm>
+            <a:off x="8907306" y="2029653"/>
+            <a:ext cx="1791773" cy="461665"/>
+          </a:xfrm>
+          <a:prstGeom prst="rect">
+            <a:avLst/>
+          </a:prstGeom>
+          <a:noFill/>
+        </p:spPr>
+        <p:txBody>
+          <a:bodyPr wrap="none" rtlCol="0">
+            <a:spAutoFit/>
+          </a:bodyPr>
+          <a:lstStyle/>
           <a:p>
             <a:r>
               <a:rPr lang="en-US" sz="2400" dirty="0">
@@ -6309,30 +8409,7 @@
                   </a:schemeClr>
                 </a:solidFill>
               </a:rPr>
-              <a:t>What is recurrent neural ___         -&gt; network</a:t>
-            </a:r>
-          </a:p>
-          <a:p>
-            <a:endParaRPr lang="en-US" sz="2400" dirty="0">
-              <a:solidFill>
-                <a:schemeClr val="accent6">
-                  <a:lumMod val="60000"/>
-                  <a:lumOff val="40000"/>
-                </a:schemeClr>
-              </a:solidFill>
-            </a:endParaRPr>
-          </a:p>
-          <a:p>
-            <a:r>
-              <a:rPr lang="en-US" sz="2400" dirty="0">
-                <a:solidFill>
-                  <a:schemeClr val="accent6">
-                    <a:lumMod val="60000"/>
-                    <a:lumOff val="40000"/>
-                  </a:schemeClr>
-                </a:solidFill>
-              </a:rPr>
-              <a:t>Thanks, and  _____                            -&gt; regards.</a:t>
+              <a:t>One to many</a:t>
             </a:r>
           </a:p>
         </p:txBody>
@@ -6340,7 +8417,7 @@
     </p:spTree>
     <p:extLst>
       <p:ext uri="{BB962C8B-B14F-4D97-AF65-F5344CB8AC3E}">
-        <p14:creationId xmlns:p14="http://schemas.microsoft.com/office/powerpoint/2010/main" val="1380325406"/>
+        <p14:creationId xmlns:p14="http://schemas.microsoft.com/office/powerpoint/2010/main" val="3245406452"/>
       </p:ext>
     </p:extLst>
   </p:cSld>
@@ -7882,36 +9959,6 @@
           </a:p>
         </p:txBody>
       </p:sp>
-      <p:pic>
-        <p:nvPicPr>
-          <p:cNvPr id="5" name="Picture 4">
-            <a:extLst>
-              <a:ext uri="{FF2B5EF4-FFF2-40B4-BE49-F238E27FC236}">
-                <a16:creationId xmlns:a16="http://schemas.microsoft.com/office/drawing/2014/main" id="{59A45BC1-BFC2-C143-544F-90F94ECAF8C6}"/>
-              </a:ext>
-            </a:extLst>
-          </p:cNvPr>
-          <p:cNvPicPr>
-            <a:picLocks noChangeAspect="1"/>
-          </p:cNvPicPr>
-          <p:nvPr/>
-        </p:nvPicPr>
-        <p:blipFill>
-          <a:blip r:embed="rId3"/>
-          <a:stretch>
-            <a:fillRect/>
-          </a:stretch>
-        </p:blipFill>
-        <p:spPr>
-          <a:xfrm>
-            <a:off x="8245767" y="4020021"/>
-            <a:ext cx="1578447" cy="2765004"/>
-          </a:xfrm>
-          <a:prstGeom prst="rect">
-            <a:avLst/>
-          </a:prstGeom>
-        </p:spPr>
-      </p:pic>
     </p:spTree>
     <p:extLst>
       <p:ext uri="{BB962C8B-B14F-4D97-AF65-F5344CB8AC3E}">
@@ -9284,7 +11331,7 @@
         </p:nvSpPr>
         <p:spPr>
           <a:xfrm>
-            <a:off x="1929874" y="3562279"/>
+            <a:off x="1910710" y="3613836"/>
             <a:ext cx="501997" cy="299743"/>
           </a:xfrm>
           <a:prstGeom prst="rect">
@@ -9468,36 +11515,6 @@
           </a:p>
         </p:txBody>
       </p:sp>
-      <p:pic>
-        <p:nvPicPr>
-          <p:cNvPr id="8" name="Picture 7">
-            <a:extLst>
-              <a:ext uri="{FF2B5EF4-FFF2-40B4-BE49-F238E27FC236}">
-                <a16:creationId xmlns:a16="http://schemas.microsoft.com/office/drawing/2014/main" id="{1B22EE1B-66C6-B37F-1F76-E19A7EEFED9D}"/>
-              </a:ext>
-            </a:extLst>
-          </p:cNvPr>
-          <p:cNvPicPr>
-            <a:picLocks noChangeAspect="1"/>
-          </p:cNvPicPr>
-          <p:nvPr/>
-        </p:nvPicPr>
-        <p:blipFill>
-          <a:blip r:embed="rId2"/>
-          <a:stretch>
-            <a:fillRect/>
-          </a:stretch>
-        </p:blipFill>
-        <p:spPr>
-          <a:xfrm>
-            <a:off x="8245767" y="4020021"/>
-            <a:ext cx="1578447" cy="2765004"/>
-          </a:xfrm>
-          <a:prstGeom prst="rect">
-            <a:avLst/>
-          </a:prstGeom>
-        </p:spPr>
-      </p:pic>
     </p:spTree>
     <p:extLst>
       <p:ext uri="{BB962C8B-B14F-4D97-AF65-F5344CB8AC3E}">
@@ -11054,36 +13071,6 @@
           </a:p>
         </p:txBody>
       </p:sp>
-      <p:pic>
-        <p:nvPicPr>
-          <p:cNvPr id="10" name="Picture 9">
-            <a:extLst>
-              <a:ext uri="{FF2B5EF4-FFF2-40B4-BE49-F238E27FC236}">
-                <a16:creationId xmlns:a16="http://schemas.microsoft.com/office/drawing/2014/main" id="{FF115AEB-E296-DABA-6DE7-C375AD55D582}"/>
-              </a:ext>
-            </a:extLst>
-          </p:cNvPr>
-          <p:cNvPicPr>
-            <a:picLocks noChangeAspect="1"/>
-          </p:cNvPicPr>
-          <p:nvPr/>
-        </p:nvPicPr>
-        <p:blipFill>
-          <a:blip r:embed="rId2"/>
-          <a:stretch>
-            <a:fillRect/>
-          </a:stretch>
-        </p:blipFill>
-        <p:spPr>
-          <a:xfrm>
-            <a:off x="8245767" y="4020021"/>
-            <a:ext cx="1578447" cy="2765004"/>
-          </a:xfrm>
-          <a:prstGeom prst="rect">
-            <a:avLst/>
-          </a:prstGeom>
-        </p:spPr>
-      </p:pic>
     </p:spTree>
     <p:extLst>
       <p:ext uri="{BB962C8B-B14F-4D97-AF65-F5344CB8AC3E}">
@@ -12371,36 +14358,6 @@
           </a:p>
         </p:txBody>
       </p:sp>
-      <p:pic>
-        <p:nvPicPr>
-          <p:cNvPr id="31" name="Picture 30">
-            <a:extLst>
-              <a:ext uri="{FF2B5EF4-FFF2-40B4-BE49-F238E27FC236}">
-                <a16:creationId xmlns:a16="http://schemas.microsoft.com/office/drawing/2014/main" id="{2209BD65-D171-E953-F9F0-4AE4ADCB0010}"/>
-              </a:ext>
-            </a:extLst>
-          </p:cNvPr>
-          <p:cNvPicPr>
-            <a:picLocks noChangeAspect="1"/>
-          </p:cNvPicPr>
-          <p:nvPr/>
-        </p:nvPicPr>
-        <p:blipFill>
-          <a:blip r:embed="rId3"/>
-          <a:stretch>
-            <a:fillRect/>
-          </a:stretch>
-        </p:blipFill>
-        <p:spPr>
-          <a:xfrm>
-            <a:off x="9942486" y="3117674"/>
-            <a:ext cx="1571765" cy="2879737"/>
-          </a:xfrm>
-          <a:prstGeom prst="rect">
-            <a:avLst/>
-          </a:prstGeom>
-        </p:spPr>
-      </p:pic>
     </p:spTree>
     <p:extLst>
       <p:ext uri="{BB962C8B-B14F-4D97-AF65-F5344CB8AC3E}">
@@ -12415,6 +14372,217 @@
 </file>
 
 <file path=ppt/slides/slide8.xml><?xml version="1.0" encoding="utf-8"?>
+<p:sld xmlns:a="http://schemas.openxmlformats.org/drawingml/2006/main" xmlns:r="http://schemas.openxmlformats.org/officeDocument/2006/relationships" xmlns:p="http://schemas.openxmlformats.org/presentationml/2006/main">
+  <p:cSld>
+    <p:spTree>
+      <p:nvGrpSpPr>
+        <p:cNvPr id="1" name="">
+          <a:extLst>
+            <a:ext uri="{FF2B5EF4-FFF2-40B4-BE49-F238E27FC236}">
+              <a16:creationId xmlns:a16="http://schemas.microsoft.com/office/drawing/2014/main" id="{2A1FD7F3-200E-051E-C734-46986F01D077}"/>
+            </a:ext>
+          </a:extLst>
+        </p:cNvPr>
+        <p:cNvGrpSpPr/>
+        <p:nvPr/>
+      </p:nvGrpSpPr>
+      <p:grpSpPr>
+        <a:xfrm>
+          <a:off x="0" y="0"/>
+          <a:ext cx="0" cy="0"/>
+          <a:chOff x="0" y="0"/>
+          <a:chExt cx="0" cy="0"/>
+        </a:xfrm>
+      </p:grpSpPr>
+      <p:sp>
+        <p:nvSpPr>
+          <p:cNvPr id="6" name="TextBox 5">
+            <a:extLst>
+              <a:ext uri="{FF2B5EF4-FFF2-40B4-BE49-F238E27FC236}">
+                <a16:creationId xmlns:a16="http://schemas.microsoft.com/office/drawing/2014/main" id="{C6E1C713-F72D-D22E-CA9B-EB1C59A79116}"/>
+              </a:ext>
+            </a:extLst>
+          </p:cNvPr>
+          <p:cNvSpPr txBox="1"/>
+          <p:nvPr/>
+        </p:nvSpPr>
+        <p:spPr>
+          <a:xfrm>
+            <a:off x="374904" y="311557"/>
+            <a:ext cx="9043416" cy="3416320"/>
+          </a:xfrm>
+          <a:prstGeom prst="rect">
+            <a:avLst/>
+          </a:prstGeom>
+          <a:noFill/>
+        </p:spPr>
+        <p:txBody>
+          <a:bodyPr wrap="square">
+            <a:spAutoFit/>
+          </a:bodyPr>
+          <a:lstStyle/>
+          <a:p>
+            <a:r>
+              <a:rPr lang="en-US" sz="2400" b="1" dirty="0">
+                <a:solidFill>
+                  <a:schemeClr val="accent6">
+                    <a:lumMod val="60000"/>
+                    <a:lumOff val="40000"/>
+                  </a:schemeClr>
+                </a:solidFill>
+              </a:rPr>
+              <a:t>Autocompletion by google in  </a:t>
+            </a:r>
+            <a:r>
+              <a:rPr lang="en-US" sz="2400" b="1" u="sng" dirty="0">
+                <a:solidFill>
+                  <a:schemeClr val="accent6">
+                    <a:lumMod val="60000"/>
+                    <a:lumOff val="40000"/>
+                  </a:schemeClr>
+                </a:solidFill>
+              </a:rPr>
+              <a:t>search/email</a:t>
+            </a:r>
+            <a:r>
+              <a:rPr lang="en-US" sz="2400" b="1" dirty="0">
+                <a:solidFill>
+                  <a:schemeClr val="accent6">
+                    <a:lumMod val="60000"/>
+                    <a:lumOff val="40000"/>
+                  </a:schemeClr>
+                </a:solidFill>
+              </a:rPr>
+              <a:t>: </a:t>
+            </a:r>
+            <a:r>
+              <a:rPr lang="en-US" sz="2400" dirty="0">
+                <a:solidFill>
+                  <a:schemeClr val="accent6">
+                    <a:lumMod val="60000"/>
+                    <a:lumOff val="40000"/>
+                  </a:schemeClr>
+                </a:solidFill>
+              </a:rPr>
+              <a:t>(Predicting only 1 word)</a:t>
+            </a:r>
+            <a:endParaRPr lang="en-US" sz="2400" b="1" dirty="0">
+              <a:solidFill>
+                <a:schemeClr val="accent6">
+                  <a:lumMod val="60000"/>
+                  <a:lumOff val="40000"/>
+                </a:schemeClr>
+              </a:solidFill>
+            </a:endParaRPr>
+          </a:p>
+          <a:p>
+            <a:endParaRPr lang="en-US" sz="2400" dirty="0">
+              <a:solidFill>
+                <a:schemeClr val="accent6">
+                  <a:lumMod val="60000"/>
+                  <a:lumOff val="40000"/>
+                </a:schemeClr>
+              </a:solidFill>
+            </a:endParaRPr>
+          </a:p>
+          <a:p>
+            <a:r>
+              <a:rPr lang="en-US" sz="2400" dirty="0">
+                <a:solidFill>
+                  <a:schemeClr val="accent6">
+                    <a:lumMod val="60000"/>
+                    <a:lumOff val="40000"/>
+                  </a:schemeClr>
+                </a:solidFill>
+              </a:rPr>
+              <a:t>I want to understand deep  ____   -&gt; learning</a:t>
+            </a:r>
+          </a:p>
+          <a:p>
+            <a:endParaRPr lang="en-US" sz="2400" dirty="0">
+              <a:solidFill>
+                <a:schemeClr val="accent6">
+                  <a:lumMod val="60000"/>
+                  <a:lumOff val="40000"/>
+                </a:schemeClr>
+              </a:solidFill>
+            </a:endParaRPr>
+          </a:p>
+          <a:p>
+            <a:r>
+              <a:rPr lang="en-US" sz="2400" dirty="0">
+                <a:solidFill>
+                  <a:schemeClr val="accent6">
+                    <a:lumMod val="60000"/>
+                    <a:lumOff val="40000"/>
+                  </a:schemeClr>
+                </a:solidFill>
+              </a:rPr>
+              <a:t>Places near me to ___                      -&gt; eat</a:t>
+            </a:r>
+          </a:p>
+          <a:p>
+            <a:endParaRPr lang="en-US" sz="2400" dirty="0">
+              <a:solidFill>
+                <a:schemeClr val="accent6">
+                  <a:lumMod val="60000"/>
+                  <a:lumOff val="40000"/>
+                </a:schemeClr>
+              </a:solidFill>
+            </a:endParaRPr>
+          </a:p>
+          <a:p>
+            <a:r>
+              <a:rPr lang="en-US" sz="2400" dirty="0">
+                <a:solidFill>
+                  <a:schemeClr val="accent6">
+                    <a:lumMod val="60000"/>
+                    <a:lumOff val="40000"/>
+                  </a:schemeClr>
+                </a:solidFill>
+              </a:rPr>
+              <a:t>What is recurrent neural ___         -&gt; network</a:t>
+            </a:r>
+          </a:p>
+          <a:p>
+            <a:endParaRPr lang="en-US" sz="2400" dirty="0">
+              <a:solidFill>
+                <a:schemeClr val="accent6">
+                  <a:lumMod val="60000"/>
+                  <a:lumOff val="40000"/>
+                </a:schemeClr>
+              </a:solidFill>
+            </a:endParaRPr>
+          </a:p>
+          <a:p>
+            <a:r>
+              <a:rPr lang="en-US" sz="2400" dirty="0">
+                <a:solidFill>
+                  <a:schemeClr val="accent6">
+                    <a:lumMod val="60000"/>
+                    <a:lumOff val="40000"/>
+                  </a:schemeClr>
+                </a:solidFill>
+              </a:rPr>
+              <a:t>Thanks, and  _____                            -&gt; regards.</a:t>
+            </a:r>
+          </a:p>
+        </p:txBody>
+      </p:sp>
+    </p:spTree>
+    <p:extLst>
+      <p:ext uri="{BB962C8B-B14F-4D97-AF65-F5344CB8AC3E}">
+        <p14:creationId xmlns:p14="http://schemas.microsoft.com/office/powerpoint/2010/main" val="1380325406"/>
+      </p:ext>
+    </p:extLst>
+  </p:cSld>
+  <p:clrMapOvr>
+    <a:masterClrMapping/>
+  </p:clrMapOvr>
+</p:sld>
+</file>
+
+<file path=ppt/slides/slide9.xml><?xml version="1.0" encoding="utf-8"?>
 <p:sld xmlns:a="http://schemas.openxmlformats.org/drawingml/2006/main" xmlns:r="http://schemas.openxmlformats.org/officeDocument/2006/relationships" xmlns:p="http://schemas.openxmlformats.org/presentationml/2006/main">
   <p:cSld>
     <p:spTree>
@@ -13730,144 +15898,10 @@
           </mc:Fallback>
         </mc:AlternateContent>
       </p:grpSp>
-      <p:pic>
-        <p:nvPicPr>
-          <p:cNvPr id="4" name="Picture 3">
-            <a:extLst>
-              <a:ext uri="{FF2B5EF4-FFF2-40B4-BE49-F238E27FC236}">
-                <a16:creationId xmlns:a16="http://schemas.microsoft.com/office/drawing/2014/main" id="{0CE69F06-FFD2-D44F-D442-000BE14CDF50}"/>
-              </a:ext>
-            </a:extLst>
-          </p:cNvPr>
-          <p:cNvPicPr>
-            <a:picLocks noChangeAspect="1"/>
-          </p:cNvPicPr>
-          <p:nvPr/>
-        </p:nvPicPr>
-        <p:blipFill>
-          <a:blip r:embed="rId27"/>
-          <a:stretch>
-            <a:fillRect/>
-          </a:stretch>
-        </p:blipFill>
-        <p:spPr>
-          <a:xfrm>
-            <a:off x="9235011" y="3593874"/>
-            <a:ext cx="1381318" cy="2457793"/>
-          </a:xfrm>
-          <a:prstGeom prst="rect">
-            <a:avLst/>
-          </a:prstGeom>
-        </p:spPr>
-      </p:pic>
     </p:spTree>
     <p:extLst>
       <p:ext uri="{BB962C8B-B14F-4D97-AF65-F5344CB8AC3E}">
         <p14:creationId xmlns:p14="http://schemas.microsoft.com/office/powerpoint/2010/main" val="3312491569"/>
-      </p:ext>
-    </p:extLst>
-  </p:cSld>
-  <p:clrMapOvr>
-    <a:masterClrMapping/>
-  </p:clrMapOvr>
-</p:sld>
-</file>
-
-<file path=ppt/slides/slide9.xml><?xml version="1.0" encoding="utf-8"?>
-<p:sld xmlns:a="http://schemas.openxmlformats.org/drawingml/2006/main" xmlns:r="http://schemas.openxmlformats.org/officeDocument/2006/relationships" xmlns:p="http://schemas.openxmlformats.org/presentationml/2006/main">
-  <p:cSld>
-    <p:spTree>
-      <p:nvGrpSpPr>
-        <p:cNvPr id="1" name=""/>
-        <p:cNvGrpSpPr/>
-        <p:nvPr/>
-      </p:nvGrpSpPr>
-      <p:grpSpPr>
-        <a:xfrm>
-          <a:off x="0" y="0"/>
-          <a:ext cx="0" cy="0"/>
-          <a:chOff x="0" y="0"/>
-          <a:chExt cx="0" cy="0"/>
-        </a:xfrm>
-      </p:grpSpPr>
-      <p:sp>
-        <p:nvSpPr>
-          <p:cNvPr id="2" name="Title 1"/>
-          <p:cNvSpPr>
-            <a:spLocks noGrp="1"/>
-          </p:cNvSpPr>
-          <p:nvPr>
-            <p:ph type="title"/>
-          </p:nvPr>
-        </p:nvSpPr>
-        <p:spPr/>
-        <p:txBody>
-          <a:bodyPr/>
-          <a:lstStyle/>
-          <a:p>
-            <a:r>
-              <a:rPr lang="en-US" b="1"/>
-              <a:t>Differences Between RNN and CNN</a:t>
-            </a:r>
-            <a:endParaRPr lang="en-US" dirty="0"/>
-          </a:p>
-        </p:txBody>
-      </p:sp>
-      <p:sp>
-        <p:nvSpPr>
-          <p:cNvPr id="3" name="Content Placeholder 2"/>
-          <p:cNvSpPr>
-            <a:spLocks noGrp="1"/>
-          </p:cNvSpPr>
-          <p:nvPr>
-            <p:ph idx="1"/>
-          </p:nvPr>
-        </p:nvSpPr>
-        <p:spPr/>
-        <p:txBody>
-          <a:bodyPr>
-            <a:normAutofit lnSpcReduction="10000"/>
-          </a:bodyPr>
-          <a:lstStyle/>
-          <a:p>
-            <a:r>
-              <a:rPr lang="en-US" dirty="0"/>
-              <a:t>CNN is applicable for sparse data like images. RNN is applicable for time series and sequential data.</a:t>
-            </a:r>
-          </a:p>
-          <a:p>
-            <a:r>
-              <a:rPr lang="en-US" dirty="0"/>
-              <a:t>While training the model, CNN uses a simple backpropagation and RNN uses backpropagation through time to calculate the loss.</a:t>
-            </a:r>
-          </a:p>
-          <a:p>
-            <a:r>
-              <a:rPr lang="en-US" dirty="0"/>
-              <a:t>RNN can have no restriction in length of inputs and outputs, but CNN has finite inputs and finite outputs.</a:t>
-            </a:r>
-          </a:p>
-          <a:p>
-            <a:r>
-              <a:rPr lang="en-US" dirty="0"/>
-              <a:t>CNN has a feedforward network and RNN works on loops to handle sequential data.</a:t>
-            </a:r>
-          </a:p>
-          <a:p>
-            <a:r>
-              <a:rPr lang="en-US" dirty="0"/>
-              <a:t>CNN can also be used for video and image processing. RNN is primarily used for speech and text analysis.</a:t>
-            </a:r>
-          </a:p>
-          <a:p>
-            <a:endParaRPr lang="en-US" dirty="0"/>
-          </a:p>
-        </p:txBody>
-      </p:sp>
-    </p:spTree>
-    <p:extLst>
-      <p:ext uri="{BB962C8B-B14F-4D97-AF65-F5344CB8AC3E}">
-        <p14:creationId xmlns:p14="http://schemas.microsoft.com/office/powerpoint/2010/main" val="901516271"/>
       </p:ext>
     </p:extLst>
   </p:cSld>
